--- a/Apresentacao_Spectrum_Editavel.pptx
+++ b/Apresentacao_Spectrum_Editavel.pptx
@@ -36,9 +36,6 @@
     <p:sldId id="284" r:id="rId35"/>
     <p:sldId id="285" r:id="rId36"/>
     <p:sldId id="286" r:id="rId37"/>
-    <p:sldId id="287" r:id="rId38"/>
-    <p:sldId id="288" r:id="rId39"/>
-    <p:sldId id="289" r:id="rId40"/>
   </p:sldIdLst>
   <p:sldSz cx="12191695" cy="6858000" type="screen4x3"/>
   <p:notesSz cx="6858000" cy="9144000"/>
@@ -3217,6 +3214,2360 @@
           <a:lstStyle/>
           <a:p>
             <a:r>
+              <a:t>Compressão Estrutural Massiva</a:t>
+            </a:r>
+          </a:p>
+        </p:txBody>
+      </p:sp>
+      <p:sp>
+        <p:nvSpPr>
+          <p:cNvPr id="3" name="Content Placeholder 2"/>
+          <p:cNvSpPr>
+            <a:spLocks noGrp="1"/>
+          </p:cNvSpPr>
+          <p:nvPr>
+            <p:ph idx="1"/>
+          </p:nvPr>
+        </p:nvSpPr>
+        <p:spPr/>
+        <p:txBody>
+          <a:bodyPr/>
+          <a:lstStyle/>
+          <a:p/>
+          <a:p>
+            <a:pPr>
+              <a:defRPr sz="2200"/>
+            </a:pPr>
+            <a:r>
+              <a:t>Na prática, as regras algébricas do E-graph agrupam milhares de e-classes, criando uma teia altamente densa capaz de representar infinitas equações.</a:t>
+            </a:r>
+          </a:p>
+          <a:p>
+            <a:pPr>
+              <a:defRPr sz="2200"/>
+            </a:pPr>
+            <a:r>
+              <a:t>Raio-x topológico de um E-graph após rodar o treinamento.</a:t>
+            </a:r>
+          </a:p>
+        </p:txBody>
+      </p:sp>
+      <p:pic>
+        <p:nvPicPr>
+          <p:cNvPr id="4" name="Picture 3" descr="egraph.png"/>
+          <p:cNvPicPr>
+            <a:picLocks noChangeAspect="1"/>
+          </p:cNvPicPr>
+          <p:nvPr/>
+        </p:nvPicPr>
+        <p:blipFill>
+          <a:blip r:embed="rId2"/>
+          <a:stretch>
+            <a:fillRect/>
+          </a:stretch>
+        </p:blipFill>
+        <p:spPr>
+          <a:xfrm>
+            <a:off x="6400800" y="1828800"/>
+            <a:ext cx="4572000" cy="3755631"/>
+          </a:xfrm>
+          <a:prstGeom prst="rect">
+            <a:avLst/>
+          </a:prstGeom>
+        </p:spPr>
+      </p:pic>
+    </p:spTree>
+  </p:cSld>
+  <p:clrMapOvr>
+    <a:masterClrMapping/>
+  </p:clrMapOvr>
+</p:sld>
+</file>
+
+<file path=ppt/slides/slide11.xml><?xml version="1.0" encoding="utf-8"?>
+<p:sld xmlns:a="http://schemas.openxmlformats.org/drawingml/2006/main" xmlns:p="http://schemas.openxmlformats.org/presentationml/2006/main" xmlns:r="http://schemas.openxmlformats.org/officeDocument/2006/relationships">
+  <p:cSld>
+    <p:spTree>
+      <p:nvGrpSpPr>
+        <p:cNvPr id="1" name=""/>
+        <p:cNvGrpSpPr/>
+        <p:nvPr/>
+      </p:nvGrpSpPr>
+      <p:grpSpPr/>
+      <p:sp>
+        <p:nvSpPr>
+          <p:cNvPr id="2" name="Title 1"/>
+          <p:cNvSpPr>
+            <a:spLocks noGrp="1"/>
+          </p:cNvSpPr>
+          <p:nvPr>
+            <p:ph type="title"/>
+          </p:nvPr>
+        </p:nvSpPr>
+        <p:spPr/>
+        <p:txBody>
+          <a:bodyPr/>
+          <a:lstStyle/>
+          <a:p>
+            <a:r>
+              <a:t>A Dinâmica Interativa dos E-graphs - Etapa 1</a:t>
+            </a:r>
+          </a:p>
+        </p:txBody>
+      </p:sp>
+      <p:sp>
+        <p:nvSpPr>
+          <p:cNvPr id="3" name="TextBox 2"/>
+          <p:cNvSpPr txBox="1"/>
+          <p:nvPr/>
+        </p:nvSpPr>
+        <p:spPr>
+          <a:xfrm>
+            <a:off x="914400" y="1371600"/>
+            <a:ext cx="10058400" cy="914400"/>
+          </a:xfrm>
+          <a:prstGeom prst="rect">
+            <a:avLst/>
+          </a:prstGeom>
+          <a:noFill/>
+        </p:spPr>
+        <p:txBody>
+          <a:bodyPr wrap="square">
+            <a:spAutoFit/>
+          </a:bodyPr>
+          <a:lstStyle/>
+          <a:p/>
+          <a:p>
+            <a:pPr>
+              <a:defRPr sz="2400"/>
+            </a:pPr>
+            <a:r>
+              <a:t>1. Inclusão: Expressões matemáticas base como x * 2 e x + x são instanciadas, formando e-classes independentes.</a:t>
+            </a:r>
+          </a:p>
+        </p:txBody>
+      </p:sp>
+      <p:pic>
+        <p:nvPicPr>
+          <p:cNvPr id="4" name="Picture 3" descr="egraph_step_1.png"/>
+          <p:cNvPicPr>
+            <a:picLocks noChangeAspect="1"/>
+          </p:cNvPicPr>
+          <p:nvPr/>
+        </p:nvPicPr>
+        <p:blipFill>
+          <a:blip r:embed="rId2"/>
+          <a:stretch>
+            <a:fillRect/>
+          </a:stretch>
+        </p:blipFill>
+        <p:spPr>
+          <a:xfrm>
+            <a:off x="2286000" y="2743200"/>
+            <a:ext cx="7315200" cy="2788057"/>
+          </a:xfrm>
+          <a:prstGeom prst="rect">
+            <a:avLst/>
+          </a:prstGeom>
+        </p:spPr>
+      </p:pic>
+    </p:spTree>
+  </p:cSld>
+  <p:clrMapOvr>
+    <a:masterClrMapping/>
+  </p:clrMapOvr>
+</p:sld>
+</file>
+
+<file path=ppt/slides/slide12.xml><?xml version="1.0" encoding="utf-8"?>
+<p:sld xmlns:a="http://schemas.openxmlformats.org/drawingml/2006/main" xmlns:p="http://schemas.openxmlformats.org/presentationml/2006/main" xmlns:r="http://schemas.openxmlformats.org/officeDocument/2006/relationships">
+  <p:cSld>
+    <p:spTree>
+      <p:nvGrpSpPr>
+        <p:cNvPr id="1" name=""/>
+        <p:cNvGrpSpPr/>
+        <p:nvPr/>
+      </p:nvGrpSpPr>
+      <p:grpSpPr/>
+      <p:sp>
+        <p:nvSpPr>
+          <p:cNvPr id="2" name="Title 1"/>
+          <p:cNvSpPr>
+            <a:spLocks noGrp="1"/>
+          </p:cNvSpPr>
+          <p:nvPr>
+            <p:ph type="title"/>
+          </p:nvPr>
+        </p:nvSpPr>
+        <p:spPr/>
+        <p:txBody>
+          <a:bodyPr/>
+          <a:lstStyle/>
+          <a:p>
+            <a:r>
+              <a:t>A Dinâmica Interativa dos E-graphs - Etapa 2</a:t>
+            </a:r>
+          </a:p>
+        </p:txBody>
+      </p:sp>
+      <p:sp>
+        <p:nvSpPr>
+          <p:cNvPr id="3" name="TextBox 2"/>
+          <p:cNvSpPr txBox="1"/>
+          <p:nvPr/>
+        </p:nvSpPr>
+        <p:spPr>
+          <a:xfrm>
+            <a:off x="914400" y="1371600"/>
+            <a:ext cx="10058400" cy="914400"/>
+          </a:xfrm>
+          <a:prstGeom prst="rect">
+            <a:avLst/>
+          </a:prstGeom>
+          <a:noFill/>
+        </p:spPr>
+        <p:txBody>
+          <a:bodyPr wrap="square">
+            <a:spAutoFit/>
+          </a:bodyPr>
+          <a:lstStyle/>
+          <a:p/>
+          <a:p>
+            <a:pPr>
+              <a:defRPr sz="2400"/>
+            </a:pPr>
+            <a:r>
+              <a:t>2. Reescrita: As regras de reescrita são aplicadas, conectando e-classes distintas com base em equivalências matemáticas (ex. a * 2 = a + a).</a:t>
+            </a:r>
+          </a:p>
+        </p:txBody>
+      </p:sp>
+      <p:pic>
+        <p:nvPicPr>
+          <p:cNvPr id="4" name="Picture 3" descr="egraph_step_2.png"/>
+          <p:cNvPicPr>
+            <a:picLocks noChangeAspect="1"/>
+          </p:cNvPicPr>
+          <p:nvPr/>
+        </p:nvPicPr>
+        <p:blipFill>
+          <a:blip r:embed="rId2"/>
+          <a:stretch>
+            <a:fillRect/>
+          </a:stretch>
+        </p:blipFill>
+        <p:spPr>
+          <a:xfrm>
+            <a:off x="2286000" y="2743200"/>
+            <a:ext cx="7315200" cy="2788057"/>
+          </a:xfrm>
+          <a:prstGeom prst="rect">
+            <a:avLst/>
+          </a:prstGeom>
+        </p:spPr>
+      </p:pic>
+    </p:spTree>
+  </p:cSld>
+  <p:clrMapOvr>
+    <a:masterClrMapping/>
+  </p:clrMapOvr>
+</p:sld>
+</file>
+
+<file path=ppt/slides/slide13.xml><?xml version="1.0" encoding="utf-8"?>
+<p:sld xmlns:a="http://schemas.openxmlformats.org/drawingml/2006/main" xmlns:p="http://schemas.openxmlformats.org/presentationml/2006/main" xmlns:r="http://schemas.openxmlformats.org/officeDocument/2006/relationships">
+  <p:cSld>
+    <p:spTree>
+      <p:nvGrpSpPr>
+        <p:cNvPr id="1" name=""/>
+        <p:cNvGrpSpPr/>
+        <p:nvPr/>
+      </p:nvGrpSpPr>
+      <p:grpSpPr/>
+      <p:sp>
+        <p:nvSpPr>
+          <p:cNvPr id="2" name="Title 1"/>
+          <p:cNvSpPr>
+            <a:spLocks noGrp="1"/>
+          </p:cNvSpPr>
+          <p:nvPr>
+            <p:ph type="title"/>
+          </p:nvPr>
+        </p:nvSpPr>
+        <p:spPr/>
+        <p:txBody>
+          <a:bodyPr/>
+          <a:lstStyle/>
+          <a:p>
+            <a:r>
+              <a:t>A Dinâmica Interativa dos E-graphs - Etapa 3</a:t>
+            </a:r>
+          </a:p>
+        </p:txBody>
+      </p:sp>
+      <p:sp>
+        <p:nvSpPr>
+          <p:cNvPr id="3" name="TextBox 2"/>
+          <p:cNvSpPr txBox="1"/>
+          <p:nvPr/>
+        </p:nvSpPr>
+        <p:spPr>
+          <a:xfrm>
+            <a:off x="914400" y="1371600"/>
+            <a:ext cx="10058400" cy="914400"/>
+          </a:xfrm>
+          <a:prstGeom prst="rect">
+            <a:avLst/>
+          </a:prstGeom>
+          <a:noFill/>
+        </p:spPr>
+        <p:txBody>
+          <a:bodyPr wrap="square">
+            <a:spAutoFit/>
+          </a:bodyPr>
+          <a:lstStyle/>
+          <a:p/>
+          <a:p>
+            <a:pPr>
+              <a:defRPr sz="2400"/>
+            </a:pPr>
+            <a:r>
+              <a:t>3. Saturação de Igualdade: As equivalências sofrem fusão, englobando os e-nodes em uma única estrutura representacional.</a:t>
+            </a:r>
+          </a:p>
+        </p:txBody>
+      </p:sp>
+      <p:pic>
+        <p:nvPicPr>
+          <p:cNvPr id="4" name="Picture 3" descr="egraph_step_3.png"/>
+          <p:cNvPicPr>
+            <a:picLocks noChangeAspect="1"/>
+          </p:cNvPicPr>
+          <p:nvPr/>
+        </p:nvPicPr>
+        <p:blipFill>
+          <a:blip r:embed="rId2"/>
+          <a:stretch>
+            <a:fillRect/>
+          </a:stretch>
+        </p:blipFill>
+        <p:spPr>
+          <a:xfrm>
+            <a:off x="2286000" y="2743200"/>
+            <a:ext cx="7315200" cy="2781156"/>
+          </a:xfrm>
+          <a:prstGeom prst="rect">
+            <a:avLst/>
+          </a:prstGeom>
+        </p:spPr>
+      </p:pic>
+    </p:spTree>
+  </p:cSld>
+  <p:clrMapOvr>
+    <a:masterClrMapping/>
+  </p:clrMapOvr>
+</p:sld>
+</file>
+
+<file path=ppt/slides/slide14.xml><?xml version="1.0" encoding="utf-8"?>
+<p:sld xmlns:a="http://schemas.openxmlformats.org/drawingml/2006/main" xmlns:p="http://schemas.openxmlformats.org/presentationml/2006/main" xmlns:r="http://schemas.openxmlformats.org/officeDocument/2006/relationships">
+  <p:cSld>
+    <p:spTree>
+      <p:nvGrpSpPr>
+        <p:cNvPr id="1" name=""/>
+        <p:cNvGrpSpPr/>
+        <p:nvPr/>
+      </p:nvGrpSpPr>
+      <p:grpSpPr/>
+      <p:sp>
+        <p:nvSpPr>
+          <p:cNvPr id="2" name="Title 1"/>
+          <p:cNvSpPr>
+            <a:spLocks noGrp="1"/>
+          </p:cNvSpPr>
+          <p:nvPr>
+            <p:ph type="title"/>
+          </p:nvPr>
+        </p:nvSpPr>
+        <p:spPr/>
+        <p:txBody>
+          <a:bodyPr/>
+          <a:lstStyle/>
+          <a:p>
+            <a:r>
+              <a:t>A Dinâmica Interativa dos E-graphs - Etapa 4</a:t>
+            </a:r>
+          </a:p>
+        </p:txBody>
+      </p:sp>
+      <p:sp>
+        <p:nvSpPr>
+          <p:cNvPr id="3" name="TextBox 2"/>
+          <p:cNvSpPr txBox="1"/>
+          <p:nvPr/>
+        </p:nvSpPr>
+        <p:spPr>
+          <a:xfrm>
+            <a:off x="914400" y="1371600"/>
+            <a:ext cx="10058400" cy="914400"/>
+          </a:xfrm>
+          <a:prstGeom prst="rect">
+            <a:avLst/>
+          </a:prstGeom>
+          <a:noFill/>
+        </p:spPr>
+        <p:txBody>
+          <a:bodyPr wrap="square">
+            <a:spAutoFit/>
+          </a:bodyPr>
+          <a:lstStyle/>
+          <a:p/>
+          <a:p>
+            <a:pPr>
+              <a:defRPr sz="2400"/>
+            </a:pPr>
+            <a:r>
+              <a:t>4. Extração: Durante a inferência, a árvore sintática é inspecionada para retornar a rota representacional mais parcimoniosa do grafo.</a:t>
+            </a:r>
+          </a:p>
+        </p:txBody>
+      </p:sp>
+      <p:pic>
+        <p:nvPicPr>
+          <p:cNvPr id="4" name="Picture 3" descr="egraph_step_4.png"/>
+          <p:cNvPicPr>
+            <a:picLocks noChangeAspect="1"/>
+          </p:cNvPicPr>
+          <p:nvPr/>
+        </p:nvPicPr>
+        <p:blipFill>
+          <a:blip r:embed="rId2"/>
+          <a:stretch>
+            <a:fillRect/>
+          </a:stretch>
+        </p:blipFill>
+        <p:spPr>
+          <a:xfrm>
+            <a:off x="2286000" y="2743200"/>
+            <a:ext cx="7315200" cy="2781156"/>
+          </a:xfrm>
+          <a:prstGeom prst="rect">
+            <a:avLst/>
+          </a:prstGeom>
+        </p:spPr>
+      </p:pic>
+    </p:spTree>
+  </p:cSld>
+  <p:clrMapOvr>
+    <a:masterClrMapping/>
+  </p:clrMapOvr>
+</p:sld>
+</file>
+
+<file path=ppt/slides/slide15.xml><?xml version="1.0" encoding="utf-8"?>
+<p:sld xmlns:a="http://schemas.openxmlformats.org/drawingml/2006/main" xmlns:p="http://schemas.openxmlformats.org/presentationml/2006/main" xmlns:r="http://schemas.openxmlformats.org/officeDocument/2006/relationships">
+  <p:cSld>
+    <p:spTree>
+      <p:nvGrpSpPr>
+        <p:cNvPr id="1" name=""/>
+        <p:cNvGrpSpPr/>
+        <p:nvPr/>
+      </p:nvGrpSpPr>
+      <p:grpSpPr/>
+      <p:sp>
+        <p:nvSpPr>
+          <p:cNvPr id="2" name="Title 1"/>
+          <p:cNvSpPr>
+            <a:spLocks noGrp="1"/>
+          </p:cNvSpPr>
+          <p:nvPr>
+            <p:ph type="title"/>
+          </p:nvPr>
+        </p:nvSpPr>
+        <p:spPr/>
+        <p:txBody>
+          <a:bodyPr/>
+          <a:lstStyle/>
+          <a:p>
+            <a:r>
+              <a:t>Barreiras das Ferramentas Atuais</a:t>
+            </a:r>
+          </a:p>
+        </p:txBody>
+      </p:sp>
+      <p:sp>
+        <p:nvSpPr>
+          <p:cNvPr id="3" name="Content Placeholder 2"/>
+          <p:cNvSpPr>
+            <a:spLocks noGrp="1"/>
+          </p:cNvSpPr>
+          <p:nvPr>
+            <p:ph idx="1"/>
+          </p:nvPr>
+        </p:nvSpPr>
+        <p:spPr/>
+        <p:txBody>
+          <a:bodyPr/>
+          <a:lstStyle/>
+          <a:p/>
+          <a:p>
+            <a:pPr>
+              <a:defRPr sz="2200"/>
+            </a:pPr>
+            <a:r>
+              <a:t>Softwares atuais de SR (como TuringBot e HeuristicLab) ainda sofrem com problemas cruciais:</a:t>
+            </a:r>
+          </a:p>
+          <a:p>
+            <a:pPr lvl="1">
+              <a:defRPr sz="2000"/>
+            </a:pPr>
+            <a:r>
+              <a:t>Peso Local: Forçam que o computador do usuário (com CPU e bateria normais) sustente sozinho toda a carga computacional do cálculo da evolução.</a:t>
+            </a:r>
+          </a:p>
+          <a:p>
+            <a:pPr lvl="1">
+              <a:defRPr sz="2000"/>
+            </a:pPr>
+            <a:r>
+              <a:t>Analista Passivo: Essas ferramentas geralmente retornam um conjunto restrito de alternativas. Isso priva o analista de navegar ativamente pelo E-graph para garimpar e consultar expressões por meio de regras personalizadas.</a:t>
+            </a:r>
+          </a:p>
+        </p:txBody>
+      </p:sp>
+    </p:spTree>
+  </p:cSld>
+  <p:clrMapOvr>
+    <a:masterClrMapping/>
+  </p:clrMapOvr>
+</p:sld>
+</file>
+
+<file path=ppt/slides/slide16.xml><?xml version="1.0" encoding="utf-8"?>
+<p:sld xmlns:a="http://schemas.openxmlformats.org/drawingml/2006/main" xmlns:p="http://schemas.openxmlformats.org/presentationml/2006/main" xmlns:r="http://schemas.openxmlformats.org/officeDocument/2006/relationships">
+  <p:cSld>
+    <p:spTree>
+      <p:nvGrpSpPr>
+        <p:cNvPr id="1" name=""/>
+        <p:cNvGrpSpPr/>
+        <p:nvPr/>
+      </p:nvGrpSpPr>
+      <p:grpSpPr/>
+      <p:sp>
+        <p:nvSpPr>
+          <p:cNvPr id="2" name="Title 1"/>
+          <p:cNvSpPr>
+            <a:spLocks noGrp="1"/>
+          </p:cNvSpPr>
+          <p:nvPr>
+            <p:ph type="title"/>
+          </p:nvPr>
+        </p:nvSpPr>
+        <p:spPr/>
+        <p:txBody>
+          <a:bodyPr/>
+          <a:lstStyle/>
+          <a:p>
+            <a:r>
+              <a:t>A Solução: Plataforma Spectrum</a:t>
+            </a:r>
+          </a:p>
+        </p:txBody>
+      </p:sp>
+      <p:sp>
+        <p:nvSpPr>
+          <p:cNvPr id="3" name="Content Placeholder 2"/>
+          <p:cNvSpPr>
+            <a:spLocks noGrp="1"/>
+          </p:cNvSpPr>
+          <p:nvPr>
+            <p:ph idx="1"/>
+          </p:nvPr>
+        </p:nvSpPr>
+        <p:spPr/>
+        <p:txBody>
+          <a:bodyPr/>
+          <a:lstStyle/>
+          <a:p/>
+          <a:p>
+            <a:pPr lvl="1">
+              <a:defRPr sz="2000"/>
+            </a:pPr>
+            <a:r>
+              <a:t>Criamos uma ferramenta nativa Web e em Nuvem dedicada a resolver todos os problemas de usabilidade da pesquisa em Regressão Simbólica.</a:t>
+            </a:r>
+          </a:p>
+          <a:p>
+            <a:pPr lvl="1">
+              <a:defRPr sz="2000"/>
+            </a:pPr>
+            <a:r>
+              <a:t>O processamento massivo ocorre invisível na nuvem, poupando a máquina do usuário final de travamentos.</a:t>
+            </a:r>
+          </a:p>
+          <a:p>
+            <a:pPr lvl="1">
+              <a:defRPr sz="2000"/>
+            </a:pPr>
+            <a:r>
+              <a:t>Centraliza 100% da operação num ambiente amigável: do momento de subir a tabela de dados até a geração do relatório visual conclusivo.</a:t>
+            </a:r>
+          </a:p>
+        </p:txBody>
+      </p:sp>
+      <p:pic>
+        <p:nvPicPr>
+          <p:cNvPr id="4" name="Picture 3" descr="profile_aberta.png"/>
+          <p:cNvPicPr>
+            <a:picLocks noChangeAspect="1"/>
+          </p:cNvPicPr>
+          <p:nvPr/>
+        </p:nvPicPr>
+        <p:blipFill>
+          <a:blip r:embed="rId2"/>
+          <a:stretch>
+            <a:fillRect/>
+          </a:stretch>
+        </p:blipFill>
+        <p:spPr>
+          <a:xfrm>
+            <a:off x="6400800" y="1828800"/>
+            <a:ext cx="4572000" cy="2244306"/>
+          </a:xfrm>
+          <a:prstGeom prst="rect">
+            <a:avLst/>
+          </a:prstGeom>
+        </p:spPr>
+      </p:pic>
+    </p:spTree>
+  </p:cSld>
+  <p:clrMapOvr>
+    <a:masterClrMapping/>
+  </p:clrMapOvr>
+</p:sld>
+</file>
+
+<file path=ppt/slides/slide17.xml><?xml version="1.0" encoding="utf-8"?>
+<p:sld xmlns:a="http://schemas.openxmlformats.org/drawingml/2006/main" xmlns:p="http://schemas.openxmlformats.org/presentationml/2006/main" xmlns:r="http://schemas.openxmlformats.org/officeDocument/2006/relationships">
+  <p:cSld>
+    <p:spTree>
+      <p:nvGrpSpPr>
+        <p:cNvPr id="1" name=""/>
+        <p:cNvGrpSpPr/>
+        <p:nvPr/>
+      </p:nvGrpSpPr>
+      <p:grpSpPr/>
+      <p:sp>
+        <p:nvSpPr>
+          <p:cNvPr id="2" name="Title 1"/>
+          <p:cNvSpPr>
+            <a:spLocks noGrp="1"/>
+          </p:cNvSpPr>
+          <p:nvPr>
+            <p:ph type="title"/>
+          </p:nvPr>
+        </p:nvSpPr>
+        <p:spPr/>
+        <p:txBody>
+          <a:bodyPr/>
+          <a:lstStyle/>
+          <a:p>
+            <a:r>
+              <a:t>Domain-Driven Design (A Arquitetura)</a:t>
+            </a:r>
+          </a:p>
+        </p:txBody>
+      </p:sp>
+      <p:sp>
+        <p:nvSpPr>
+          <p:cNvPr id="3" name="Content Placeholder 2"/>
+          <p:cNvSpPr>
+            <a:spLocks noGrp="1"/>
+          </p:cNvSpPr>
+          <p:nvPr>
+            <p:ph idx="1"/>
+          </p:nvPr>
+        </p:nvSpPr>
+        <p:spPr/>
+        <p:txBody>
+          <a:bodyPr/>
+          <a:lstStyle/>
+          <a:p/>
+          <a:p>
+            <a:pPr>
+              <a:defRPr sz="2200"/>
+            </a:pPr>
+            <a:r>
+              <a:t>A arquitetura do sistema segue os princípios do Domain-Driven Design (DDD), garantindo o isolamento da regra de negócio. Os principais domínios são:</a:t>
+            </a:r>
+          </a:p>
+          <a:p>
+            <a:pPr lvl="1">
+              <a:defRPr sz="2000"/>
+            </a:pPr>
+            <a:r>
+              <a:t>Authentication: Regras de login e segurança de credenciais para os pesquisadores.</a:t>
+            </a:r>
+          </a:p>
+          <a:p>
+            <a:pPr lvl="1">
+              <a:defRPr sz="2000"/>
+            </a:pPr>
+            <a:r>
+              <a:t>Workspace: Gestão e isolamento das pastas, tabelas de dados brutos e rascunhos individuais de cada usuário.</a:t>
+            </a:r>
+          </a:p>
+          <a:p>
+            <a:pPr lvl="1">
+              <a:defRPr sz="2000"/>
+            </a:pPr>
+            <a:r>
+              <a:t>Training: Coordena o envio das execuções de Inteligência Artificial para as filas na nuvem garantindo não travar a Web.</a:t>
+            </a:r>
+          </a:p>
+          <a:p>
+            <a:pPr lvl="1">
+              <a:defRPr sz="2000"/>
+            </a:pPr>
+            <a:r>
+              <a:t>Inference: O módulo que analisa o grafo já processado e exibe em tabelas os melhores resultados matemáticos garimpados.</a:t>
+            </a:r>
+          </a:p>
+        </p:txBody>
+      </p:sp>
+    </p:spTree>
+  </p:cSld>
+  <p:clrMapOvr>
+    <a:masterClrMapping/>
+  </p:clrMapOvr>
+</p:sld>
+</file>
+
+<file path=ppt/slides/slide18.xml><?xml version="1.0" encoding="utf-8"?>
+<p:sld xmlns:a="http://schemas.openxmlformats.org/drawingml/2006/main" xmlns:p="http://schemas.openxmlformats.org/presentationml/2006/main" xmlns:r="http://schemas.openxmlformats.org/officeDocument/2006/relationships">
+  <p:cSld>
+    <p:spTree>
+      <p:nvGrpSpPr>
+        <p:cNvPr id="1" name=""/>
+        <p:cNvGrpSpPr/>
+        <p:nvPr/>
+      </p:nvGrpSpPr>
+      <p:grpSpPr/>
+      <p:sp>
+        <p:nvSpPr>
+          <p:cNvPr id="2" name="Title 1"/>
+          <p:cNvSpPr>
+            <a:spLocks noGrp="1"/>
+          </p:cNvSpPr>
+          <p:nvPr>
+            <p:ph type="title"/>
+          </p:nvPr>
+        </p:nvSpPr>
+        <p:spPr/>
+        <p:txBody>
+          <a:bodyPr/>
+          <a:lstStyle/>
+          <a:p>
+            <a:r>
+              <a:t>Entidades Principais (1/2)</a:t>
+            </a:r>
+          </a:p>
+        </p:txBody>
+      </p:sp>
+      <p:sp>
+        <p:nvSpPr>
+          <p:cNvPr id="3" name="Content Placeholder 2"/>
+          <p:cNvSpPr>
+            <a:spLocks noGrp="1"/>
+          </p:cNvSpPr>
+          <p:nvPr>
+            <p:ph idx="1"/>
+          </p:nvPr>
+        </p:nvSpPr>
+        <p:spPr/>
+        <p:txBody>
+          <a:bodyPr/>
+          <a:lstStyle/>
+          <a:p/>
+          <a:p>
+            <a:pPr>
+              <a:defRPr sz="2200"/>
+            </a:pPr>
+            <a:r>
+              <a:t>Todo o fluxo de uso roda em cima de entidades centrais claras mapeadas dentro do banco de dados do sistema:</a:t>
+            </a:r>
+          </a:p>
+          <a:p>
+            <a:pPr lvl="1">
+              <a:defRPr sz="2000"/>
+            </a:pPr>
+            <a:r>
+              <a:t>User: A identidade central do pesquisador, responsável pela autenticação e controle de acesso.</a:t>
+            </a:r>
+          </a:p>
+          <a:p>
+            <a:pPr lvl="1">
+              <a:defRPr sz="2000"/>
+            </a:pPr>
+            <a:r>
+              <a:t>Dataset: Abstração lógica que armazena os metadados e as referências diretas aos arquivos CSV experimentais.</a:t>
+            </a:r>
+          </a:p>
+          <a:p>
+            <a:pPr lvl="1">
+              <a:defRPr sz="2000"/>
+            </a:pPr>
+            <a:r>
+              <a:t>Profile: Espaço de trabalho personalizado no editor que organiza os datasets importados, modelos gerados e blocos modulares.</a:t>
+            </a:r>
+          </a:p>
+        </p:txBody>
+      </p:sp>
+    </p:spTree>
+  </p:cSld>
+  <p:clrMapOvr>
+    <a:masterClrMapping/>
+  </p:clrMapOvr>
+</p:sld>
+</file>
+
+<file path=ppt/slides/slide19.xml><?xml version="1.0" encoding="utf-8"?>
+<p:sld xmlns:a="http://schemas.openxmlformats.org/drawingml/2006/main" xmlns:p="http://schemas.openxmlformats.org/presentationml/2006/main" xmlns:r="http://schemas.openxmlformats.org/officeDocument/2006/relationships">
+  <p:cSld>
+    <p:spTree>
+      <p:nvGrpSpPr>
+        <p:cNvPr id="1" name=""/>
+        <p:cNvGrpSpPr/>
+        <p:nvPr/>
+      </p:nvGrpSpPr>
+      <p:grpSpPr/>
+      <p:sp>
+        <p:nvSpPr>
+          <p:cNvPr id="2" name="Title 1"/>
+          <p:cNvSpPr>
+            <a:spLocks noGrp="1"/>
+          </p:cNvSpPr>
+          <p:nvPr>
+            <p:ph type="title"/>
+          </p:nvPr>
+        </p:nvSpPr>
+        <p:spPr/>
+        <p:txBody>
+          <a:bodyPr/>
+          <a:lstStyle/>
+          <a:p>
+            <a:r>
+              <a:t>Entidades Principais (2/2)</a:t>
+            </a:r>
+          </a:p>
+        </p:txBody>
+      </p:sp>
+      <p:sp>
+        <p:nvSpPr>
+          <p:cNvPr id="3" name="Content Placeholder 2"/>
+          <p:cNvSpPr>
+            <a:spLocks noGrp="1"/>
+          </p:cNvSpPr>
+          <p:nvPr>
+            <p:ph idx="1"/>
+          </p:nvPr>
+        </p:nvSpPr>
+        <p:spPr/>
+        <p:txBody>
+          <a:bodyPr/>
+          <a:lstStyle/>
+          <a:p/>
+          <a:p>
+            <a:pPr>
+              <a:defRPr sz="2200"/>
+            </a:pPr>
+            <a:r>
+              <a:t>Continuação das entidades encarregadas pelo processamento lógico distribuído na nuvem:</a:t>
+            </a:r>
+          </a:p>
+          <a:p>
+            <a:pPr lvl="1">
+              <a:defRPr sz="2000"/>
+            </a:pPr>
+            <a:r>
+              <a:t>Job: Configuração que encapsula e armazena os meta-parâmetros do algoritmo genético estipulados para a execução do treinamento.</a:t>
+            </a:r>
+          </a:p>
+          <a:p>
+            <a:pPr lvl="1">
+              <a:defRPr sz="2000"/>
+            </a:pPr>
+            <a:r>
+              <a:t>Model (E-graph Dump): Abstração do modelo persistido gerado após o término de um Job. Contém referências para a visualização da Fronteira de Pareto.</a:t>
+            </a:r>
+          </a:p>
+        </p:txBody>
+      </p:sp>
+    </p:spTree>
+  </p:cSld>
+  <p:clrMapOvr>
+    <a:masterClrMapping/>
+  </p:clrMapOvr>
+</p:sld>
+</file>
+
+<file path=ppt/slides/slide2.xml><?xml version="1.0" encoding="utf-8"?>
+<p:sld xmlns:a="http://schemas.openxmlformats.org/drawingml/2006/main" xmlns:p="http://schemas.openxmlformats.org/presentationml/2006/main" xmlns:r="http://schemas.openxmlformats.org/officeDocument/2006/relationships">
+  <p:cSld>
+    <p:spTree>
+      <p:nvGrpSpPr>
+        <p:cNvPr id="1" name=""/>
+        <p:cNvGrpSpPr/>
+        <p:nvPr/>
+      </p:nvGrpSpPr>
+      <p:grpSpPr/>
+      <p:sp>
+        <p:nvSpPr>
+          <p:cNvPr id="2" name="Title 1"/>
+          <p:cNvSpPr>
+            <a:spLocks noGrp="1"/>
+          </p:cNvSpPr>
+          <p:nvPr>
+            <p:ph type="title"/>
+          </p:nvPr>
+        </p:nvSpPr>
+        <p:spPr/>
+        <p:txBody>
+          <a:bodyPr/>
+          <a:lstStyle/>
+          <a:p>
+            <a:r>
+              <a:t>O Paradigma da Caixa-Preta na IA</a:t>
+            </a:r>
+          </a:p>
+        </p:txBody>
+      </p:sp>
+      <p:sp>
+        <p:nvSpPr>
+          <p:cNvPr id="3" name="Content Placeholder 2"/>
+          <p:cNvSpPr>
+            <a:spLocks noGrp="1"/>
+          </p:cNvSpPr>
+          <p:nvPr>
+            <p:ph idx="1"/>
+          </p:nvPr>
+        </p:nvSpPr>
+        <p:spPr/>
+        <p:txBody>
+          <a:bodyPr/>
+          <a:lstStyle/>
+          <a:p/>
+          <a:p>
+            <a:pPr>
+              <a:defRPr sz="2200"/>
+            </a:pPr>
+            <a:r>
+              <a:t>Modelos modernos (como Redes Neurais e LLMs) atingem alta precisão preditiva, mas carecem de interpretabilidade para validar leis da física ou explicar decisões críticas.</a:t>
+            </a:r>
+          </a:p>
+          <a:p>
+            <a:pPr lvl="1">
+              <a:defRPr sz="2000"/>
+            </a:pPr>
+            <a:r>
+              <a:t>Falta de Interpretabilidade: É extremamente difícil auditar o raciocínio interno ou justificar o porquê de uma previsão (Ex: diagnóstico médico).</a:t>
+            </a:r>
+          </a:p>
+          <a:p>
+            <a:pPr lvl="1">
+              <a:defRPr sz="2000"/>
+            </a:pPr>
+            <a:r>
+              <a:t>Barreira Científica: Nas ciências exatas, um modelo precisa ser transparente, e não apenas entregar "bons palpites" cegos.</a:t>
+            </a:r>
+          </a:p>
+        </p:txBody>
+      </p:sp>
+    </p:spTree>
+  </p:cSld>
+  <p:clrMapOvr>
+    <a:masterClrMapping/>
+  </p:clrMapOvr>
+</p:sld>
+</file>
+
+<file path=ppt/slides/slide20.xml><?xml version="1.0" encoding="utf-8"?>
+<p:sld xmlns:a="http://schemas.openxmlformats.org/drawingml/2006/main" xmlns:p="http://schemas.openxmlformats.org/presentationml/2006/main" xmlns:r="http://schemas.openxmlformats.org/officeDocument/2006/relationships">
+  <p:cSld>
+    <p:spTree>
+      <p:nvGrpSpPr>
+        <p:cNvPr id="1" name=""/>
+        <p:cNvGrpSpPr/>
+        <p:nvPr/>
+      </p:nvGrpSpPr>
+      <p:grpSpPr/>
+      <p:sp>
+        <p:nvSpPr>
+          <p:cNvPr id="2" name="Title 1"/>
+          <p:cNvSpPr>
+            <a:spLocks noGrp="1"/>
+          </p:cNvSpPr>
+          <p:nvPr>
+            <p:ph type="title"/>
+          </p:nvPr>
+        </p:nvSpPr>
+        <p:spPr/>
+        <p:txBody>
+          <a:bodyPr/>
+          <a:lstStyle/>
+          <a:p>
+            <a:r>
+              <a:t>A Linguagem IQL (Inference Query Language)</a:t>
+            </a:r>
+          </a:p>
+        </p:txBody>
+      </p:sp>
+      <p:sp>
+        <p:nvSpPr>
+          <p:cNvPr id="3" name="Content Placeholder 2"/>
+          <p:cNvSpPr>
+            <a:spLocks noGrp="1"/>
+          </p:cNvSpPr>
+          <p:nvPr>
+            <p:ph idx="1"/>
+          </p:nvPr>
+        </p:nvSpPr>
+        <p:spPr/>
+        <p:txBody>
+          <a:bodyPr/>
+          <a:lstStyle/>
+          <a:p/>
+          <a:p>
+            <a:pPr>
+              <a:defRPr sz="2200"/>
+            </a:pPr>
+            <a:r>
+              <a:t>A Inference Query Language (IQL) é uma linguagem declarativa desenvolvida para a prospecção ativa de resultados.</a:t>
+            </a:r>
+          </a:p>
+          <a:p>
+            <a:pPr>
+              <a:defRPr sz="2200"/>
+            </a:pPr>
+            <a:r>
+              <a:t>Com sintaxe estrutural análoga à linguagem SQL, a IQL foi proposta para realizar buscas e filtragens condicionais sobre os e-graphs gerados durante o treinamento.</a:t>
+            </a:r>
+          </a:p>
+          <a:p>
+            <a:pPr lvl="1">
+              <a:defRPr sz="2000"/>
+            </a:pPr>
+            <a:r>
+              <a:t>Possibilita consultas diretas baseadas no limite de erro numérico e tamanho final das árvores.</a:t>
+            </a:r>
+          </a:p>
+          <a:p>
+            <a:pPr lvl="1">
+              <a:defRPr sz="2000"/>
+            </a:pPr>
+            <a:r>
+              <a:t>Atua em conjunto à biblioteca rEGGression para casamentos de padrões simbólicos.</a:t>
+            </a:r>
+          </a:p>
+          <a:p>
+            <a:pPr lvl="1">
+              <a:defRPr sz="2000"/>
+            </a:pPr>
+            <a:r>
+              <a:t>Permite extrair a expressão ótima adequada sem depender da resposta isolada arbitrária de uma ferramenta fechada.</a:t>
+            </a:r>
+          </a:p>
+        </p:txBody>
+      </p:sp>
+    </p:spTree>
+  </p:cSld>
+  <p:clrMapOvr>
+    <a:masterClrMapping/>
+  </p:clrMapOvr>
+</p:sld>
+</file>
+
+<file path=ppt/slides/slide21.xml><?xml version="1.0" encoding="utf-8"?>
+<p:sld xmlns:a="http://schemas.openxmlformats.org/drawingml/2006/main" xmlns:p="http://schemas.openxmlformats.org/presentationml/2006/main" xmlns:r="http://schemas.openxmlformats.org/officeDocument/2006/relationships">
+  <p:cSld>
+    <p:spTree>
+      <p:nvGrpSpPr>
+        <p:cNvPr id="1" name=""/>
+        <p:cNvGrpSpPr/>
+        <p:nvPr/>
+      </p:nvGrpSpPr>
+      <p:grpSpPr/>
+      <p:sp>
+        <p:nvSpPr>
+          <p:cNvPr id="2" name="Title 1"/>
+          <p:cNvSpPr>
+            <a:spLocks noGrp="1"/>
+          </p:cNvSpPr>
+          <p:nvPr>
+            <p:ph type="title"/>
+          </p:nvPr>
+        </p:nvSpPr>
+        <p:spPr/>
+        <p:txBody>
+          <a:bodyPr/>
+          <a:lstStyle/>
+          <a:p>
+            <a:r>
+              <a:t>A Sintaxe da Exploração Ativa</a:t>
+            </a:r>
+          </a:p>
+        </p:txBody>
+      </p:sp>
+      <p:sp>
+        <p:nvSpPr>
+          <p:cNvPr id="3" name="Content Placeholder 2"/>
+          <p:cNvSpPr>
+            <a:spLocks noGrp="1"/>
+          </p:cNvSpPr>
+          <p:nvPr>
+            <p:ph idx="1"/>
+          </p:nvPr>
+        </p:nvSpPr>
+        <p:spPr/>
+        <p:txBody>
+          <a:bodyPr/>
+          <a:lstStyle/>
+          <a:p/>
+          <a:p>
+            <a:pPr>
+              <a:defRPr sz="2200"/>
+            </a:pPr>
+            <a:r>
+              <a:t>A IQL permite que o pesquisador crie regras de filtragem para formular buscas estruturadas e detalhadas:</a:t>
+            </a:r>
+          </a:p>
+          <a:p>
+            <a:pPr>
+              <a:defRPr sz="2200"/>
+            </a:pPr>
+            <a:r>
+              <a:t>SELECT TOP 5 expression, fitness, size FROM egraph_gravitacional WHERE size &lt;= 15 AND fitness &lt; 0.05 PATTERN IS LIKE sin(v0) * v1;</a:t>
+            </a:r>
+          </a:p>
+          <a:p>
+            <a:pPr lvl="1">
+              <a:defRPr sz="2000"/>
+            </a:pPr>
+            <a:r>
+              <a:t>Filtragem Estrutural (Pattern): A diretiva `PATTERN` permite a extração condicional de expressões limitando-as rigorosamente pela correspondência morfológica.</a:t>
+            </a:r>
+          </a:p>
+          <a:p>
+            <a:pPr lvl="1">
+              <a:defRPr sz="2000"/>
+            </a:pPr>
+            <a:r>
+              <a:t>Avaliação Contínua: Comunicação Server Side Events (SSE) renderiza a extração parcial das equações conforme o servidor as obtém.</a:t>
+            </a:r>
+          </a:p>
+        </p:txBody>
+      </p:sp>
+    </p:spTree>
+  </p:cSld>
+  <p:clrMapOvr>
+    <a:masterClrMapping/>
+  </p:clrMapOvr>
+</p:sld>
+</file>
+
+<file path=ppt/slides/slide22.xml><?xml version="1.0" encoding="utf-8"?>
+<p:sld xmlns:a="http://schemas.openxmlformats.org/drawingml/2006/main" xmlns:p="http://schemas.openxmlformats.org/presentationml/2006/main" xmlns:r="http://schemas.openxmlformats.org/officeDocument/2006/relationships">
+  <p:cSld>
+    <p:spTree>
+      <p:nvGrpSpPr>
+        <p:cNvPr id="1" name=""/>
+        <p:cNvGrpSpPr/>
+        <p:nvPr/>
+      </p:nvGrpSpPr>
+      <p:grpSpPr/>
+      <p:sp>
+        <p:nvSpPr>
+          <p:cNvPr id="2" name="Title 1"/>
+          <p:cNvSpPr>
+            <a:spLocks noGrp="1"/>
+          </p:cNvSpPr>
+          <p:nvPr>
+            <p:ph type="title"/>
+          </p:nvPr>
+        </p:nvSpPr>
+        <p:spPr/>
+        <p:txBody>
+          <a:bodyPr/>
+          <a:lstStyle/>
+          <a:p>
+            <a:r>
+              <a:t>Exploração e Filtros Avançados</a:t>
+            </a:r>
+          </a:p>
+        </p:txBody>
+      </p:sp>
+      <p:sp>
+        <p:nvSpPr>
+          <p:cNvPr id="3" name="Content Placeholder 2"/>
+          <p:cNvSpPr>
+            <a:spLocks noGrp="1"/>
+          </p:cNvSpPr>
+          <p:nvPr>
+            <p:ph idx="1"/>
+          </p:nvPr>
+        </p:nvSpPr>
+        <p:spPr/>
+        <p:txBody>
+          <a:bodyPr/>
+          <a:lstStyle/>
+          <a:p/>
+          <a:p>
+            <a:pPr lvl="1">
+              <a:defRPr sz="2000"/>
+            </a:pPr>
+            <a:r>
+              <a:t>A sintaxe da IQL foi desenhada para expandir o potencial de filtragem além da simples morfologia da equação.</a:t>
+            </a:r>
+          </a:p>
+          <a:p>
+            <a:pPr lvl="1">
+              <a:defRPr sz="2000"/>
+            </a:pPr>
+            <a:r>
+              <a:t>É possível definir limiares complexos combinando os metadados agregados aos E-nodes, avaliando instantaneamente as alternativas de sub-expressões que habitam a estrutura.</a:t>
+            </a:r>
+          </a:p>
+        </p:txBody>
+      </p:sp>
+      <p:pic>
+        <p:nvPicPr>
+          <p:cNvPr id="4" name="Picture 3" descr="advanced_filters.png"/>
+          <p:cNvPicPr>
+            <a:picLocks noChangeAspect="1"/>
+          </p:cNvPicPr>
+          <p:nvPr/>
+        </p:nvPicPr>
+        <p:blipFill>
+          <a:blip r:embed="rId2"/>
+          <a:stretch>
+            <a:fillRect/>
+          </a:stretch>
+        </p:blipFill>
+        <p:spPr>
+          <a:xfrm>
+            <a:off x="6400800" y="1828800"/>
+            <a:ext cx="4572000" cy="13629464"/>
+          </a:xfrm>
+          <a:prstGeom prst="rect">
+            <a:avLst/>
+          </a:prstGeom>
+        </p:spPr>
+      </p:pic>
+    </p:spTree>
+  </p:cSld>
+  <p:clrMapOvr>
+    <a:masterClrMapping/>
+  </p:clrMapOvr>
+</p:sld>
+</file>
+
+<file path=ppt/slides/slide23.xml><?xml version="1.0" encoding="utf-8"?>
+<p:sld xmlns:a="http://schemas.openxmlformats.org/drawingml/2006/main" xmlns:p="http://schemas.openxmlformats.org/presentationml/2006/main" xmlns:r="http://schemas.openxmlformats.org/officeDocument/2006/relationships">
+  <p:cSld>
+    <p:spTree>
+      <p:nvGrpSpPr>
+        <p:cNvPr id="1" name=""/>
+        <p:cNvGrpSpPr/>
+        <p:nvPr/>
+      </p:nvGrpSpPr>
+      <p:grpSpPr/>
+      <p:sp>
+        <p:nvSpPr>
+          <p:cNvPr id="2" name="Title 1"/>
+          <p:cNvSpPr>
+            <a:spLocks noGrp="1"/>
+          </p:cNvSpPr>
+          <p:nvPr>
+            <p:ph type="title"/>
+          </p:nvPr>
+        </p:nvSpPr>
+        <p:spPr/>
+        <p:txBody>
+          <a:bodyPr/>
+          <a:lstStyle/>
+          <a:p>
+            <a:r>
+              <a:t>Interface de Perfis e Blocos Modulares</a:t>
+            </a:r>
+          </a:p>
+        </p:txBody>
+      </p:sp>
+      <p:sp>
+        <p:nvSpPr>
+          <p:cNvPr id="3" name="Content Placeholder 2"/>
+          <p:cNvSpPr>
+            <a:spLocks noGrp="1"/>
+          </p:cNvSpPr>
+          <p:nvPr>
+            <p:ph idx="1"/>
+          </p:nvPr>
+        </p:nvSpPr>
+        <p:spPr/>
+        <p:txBody>
+          <a:bodyPr/>
+          <a:lstStyle/>
+          <a:p/>
+          <a:p>
+            <a:pPr lvl="1">
+              <a:defRPr sz="2000"/>
+            </a:pPr>
+            <a:r>
+              <a:t>O ambiente de trabalho unifica a extração analítica através da organização da visualização em blocos modulares.</a:t>
+            </a:r>
+          </a:p>
+          <a:p>
+            <a:pPr lvl="1">
+              <a:defRPr sz="2000"/>
+            </a:pPr>
+            <a:r>
+              <a:t>Blocos IQL: Componentes executáveis que acolhem as consultas estruturadas pelo pesquisador.</a:t>
+            </a:r>
+          </a:p>
+          <a:p>
+            <a:pPr lvl="1">
+              <a:defRPr sz="2000"/>
+            </a:pPr>
+            <a:r>
+              <a:t>Blocos Markdown: Área textual baseada na linguagem Markdown, utilizada para formatar redações e relatar a justificativa científica das expressões obtidas.</a:t>
+            </a:r>
+          </a:p>
+        </p:txBody>
+      </p:sp>
+      <p:pic>
+        <p:nvPicPr>
+          <p:cNvPr id="4" name="Picture 3" descr="inference_block_results.png"/>
+          <p:cNvPicPr>
+            <a:picLocks noChangeAspect="1"/>
+          </p:cNvPicPr>
+          <p:nvPr/>
+        </p:nvPicPr>
+        <p:blipFill>
+          <a:blip r:embed="rId2"/>
+          <a:stretch>
+            <a:fillRect/>
+          </a:stretch>
+        </p:blipFill>
+        <p:spPr>
+          <a:xfrm>
+            <a:off x="6400800" y="1828800"/>
+            <a:ext cx="4572000" cy="2537901"/>
+          </a:xfrm>
+          <a:prstGeom prst="rect">
+            <a:avLst/>
+          </a:prstGeom>
+        </p:spPr>
+      </p:pic>
+    </p:spTree>
+  </p:cSld>
+  <p:clrMapOvr>
+    <a:masterClrMapping/>
+  </p:clrMapOvr>
+</p:sld>
+</file>
+
+<file path=ppt/slides/slide24.xml><?xml version="1.0" encoding="utf-8"?>
+<p:sld xmlns:a="http://schemas.openxmlformats.org/drawingml/2006/main" xmlns:p="http://schemas.openxmlformats.org/presentationml/2006/main" xmlns:r="http://schemas.openxmlformats.org/officeDocument/2006/relationships">
+  <p:cSld>
+    <p:spTree>
+      <p:nvGrpSpPr>
+        <p:cNvPr id="1" name=""/>
+        <p:cNvGrpSpPr/>
+        <p:nvPr/>
+      </p:nvGrpSpPr>
+      <p:grpSpPr/>
+      <p:sp>
+        <p:nvSpPr>
+          <p:cNvPr id="2" name="Title 1"/>
+          <p:cNvSpPr>
+            <a:spLocks noGrp="1"/>
+          </p:cNvSpPr>
+          <p:nvPr>
+            <p:ph type="title"/>
+          </p:nvPr>
+        </p:nvSpPr>
+        <p:spPr/>
+        <p:txBody>
+          <a:bodyPr/>
+          <a:lstStyle/>
+          <a:p>
+            <a:r>
+              <a:t>Funcionalidades: Gestão de Datasets</a:t>
+            </a:r>
+          </a:p>
+        </p:txBody>
+      </p:sp>
+      <p:sp>
+        <p:nvSpPr>
+          <p:cNvPr id="3" name="Content Placeholder 2"/>
+          <p:cNvSpPr>
+            <a:spLocks noGrp="1"/>
+          </p:cNvSpPr>
+          <p:nvPr>
+            <p:ph idx="1"/>
+          </p:nvPr>
+        </p:nvSpPr>
+        <p:spPr/>
+        <p:txBody>
+          <a:bodyPr/>
+          <a:lstStyle/>
+          <a:p/>
+          <a:p>
+            <a:pPr lvl="1">
+              <a:defRPr sz="2000"/>
+            </a:pPr>
+            <a:r>
+              <a:t>Espaços de Trabalho Limpos: Todo projeto novo começa num Workspace segregado, mantendo a tela organizada.</a:t>
+            </a:r>
+          </a:p>
+          <a:p>
+            <a:pPr lvl="1">
+              <a:defRPr sz="2000"/>
+            </a:pPr>
+            <a:r>
+              <a:t>Pipeline de Dados Integrado: A abstração permite conduzir o envio dos dados, verificação morfológica e inicialização preditiva.</a:t>
+            </a:r>
+          </a:p>
+          <a:p>
+            <a:pPr lvl="1">
+              <a:defRPr sz="2000"/>
+            </a:pPr>
+            <a:r>
+              <a:t>Garantia Pré-Treino: O sistema abre uma visão da tabela final carregada, deixando o pesquisador conferir visualmente se os dados batem.</a:t>
+            </a:r>
+          </a:p>
+        </p:txBody>
+      </p:sp>
+      <p:pic>
+        <p:nvPicPr>
+          <p:cNvPr id="4" name="Picture 3" descr="upload_data_preview.png"/>
+          <p:cNvPicPr>
+            <a:picLocks noChangeAspect="1"/>
+          </p:cNvPicPr>
+          <p:nvPr/>
+        </p:nvPicPr>
+        <p:blipFill>
+          <a:blip r:embed="rId2"/>
+          <a:stretch>
+            <a:fillRect/>
+          </a:stretch>
+        </p:blipFill>
+        <p:spPr>
+          <a:xfrm>
+            <a:off x="6400800" y="1828800"/>
+            <a:ext cx="4572000" cy="2700338"/>
+          </a:xfrm>
+          <a:prstGeom prst="rect">
+            <a:avLst/>
+          </a:prstGeom>
+        </p:spPr>
+      </p:pic>
+    </p:spTree>
+  </p:cSld>
+  <p:clrMapOvr>
+    <a:masterClrMapping/>
+  </p:clrMapOvr>
+</p:sld>
+</file>
+
+<file path=ppt/slides/slide25.xml><?xml version="1.0" encoding="utf-8"?>
+<p:sld xmlns:a="http://schemas.openxmlformats.org/drawingml/2006/main" xmlns:p="http://schemas.openxmlformats.org/presentationml/2006/main" xmlns:r="http://schemas.openxmlformats.org/officeDocument/2006/relationships">
+  <p:cSld>
+    <p:spTree>
+      <p:nvGrpSpPr>
+        <p:cNvPr id="1" name=""/>
+        <p:cNvGrpSpPr/>
+        <p:nvPr/>
+      </p:nvGrpSpPr>
+      <p:grpSpPr/>
+      <p:sp>
+        <p:nvSpPr>
+          <p:cNvPr id="2" name="Title 1"/>
+          <p:cNvSpPr>
+            <a:spLocks noGrp="1"/>
+          </p:cNvSpPr>
+          <p:nvPr>
+            <p:ph type="title"/>
+          </p:nvPr>
+        </p:nvSpPr>
+        <p:spPr/>
+        <p:txBody>
+          <a:bodyPr/>
+          <a:lstStyle/>
+          <a:p>
+            <a:r>
+              <a:t>Funcionalidades: Submissão de Jobs</a:t>
+            </a:r>
+          </a:p>
+        </p:txBody>
+      </p:sp>
+      <p:sp>
+        <p:nvSpPr>
+          <p:cNvPr id="3" name="Content Placeholder 2"/>
+          <p:cNvSpPr>
+            <a:spLocks noGrp="1"/>
+          </p:cNvSpPr>
+          <p:nvPr>
+            <p:ph idx="1"/>
+          </p:nvPr>
+        </p:nvSpPr>
+        <p:spPr/>
+        <p:txBody>
+          <a:bodyPr/>
+          <a:lstStyle/>
+          <a:p/>
+          <a:p>
+            <a:pPr>
+              <a:defRPr sz="2200"/>
+            </a:pPr>
+            <a:r>
+              <a:t>A criação de modelos de regressão é plenamente configurável por meio da interface gráfica.</a:t>
+            </a:r>
+          </a:p>
+          <a:p>
+            <a:pPr lvl="1">
+              <a:defRPr sz="2000"/>
+            </a:pPr>
+            <a:r>
+              <a:t>Configuração de Parâmetros: Área dedicada à definição das variáveis estipuladas ao treinamento.</a:t>
+            </a:r>
+          </a:p>
+          <a:p>
+            <a:pPr lvl="1">
+              <a:defRPr sz="2000"/>
+            </a:pPr>
+            <a:r>
+              <a:t>Execução Distribuída: A carga computacional é despachada por meio de um broker de filas, garantindo execução isolada em Workers, liberando a interface.</a:t>
+            </a:r>
+          </a:p>
+        </p:txBody>
+      </p:sp>
+      <p:pic>
+        <p:nvPicPr>
+          <p:cNvPr id="4" name="Picture 3" descr="add_job_section.png"/>
+          <p:cNvPicPr>
+            <a:picLocks noChangeAspect="1"/>
+          </p:cNvPicPr>
+          <p:nvPr/>
+        </p:nvPicPr>
+        <p:blipFill>
+          <a:blip r:embed="rId2"/>
+          <a:stretch>
+            <a:fillRect/>
+          </a:stretch>
+        </p:blipFill>
+        <p:spPr>
+          <a:xfrm>
+            <a:off x="6400800" y="1828800"/>
+            <a:ext cx="4572000" cy="2765701"/>
+          </a:xfrm>
+          <a:prstGeom prst="rect">
+            <a:avLst/>
+          </a:prstGeom>
+        </p:spPr>
+      </p:pic>
+    </p:spTree>
+  </p:cSld>
+  <p:clrMapOvr>
+    <a:masterClrMapping/>
+  </p:clrMapOvr>
+</p:sld>
+</file>
+
+<file path=ppt/slides/slide26.xml><?xml version="1.0" encoding="utf-8"?>
+<p:sld xmlns:a="http://schemas.openxmlformats.org/drawingml/2006/main" xmlns:p="http://schemas.openxmlformats.org/presentationml/2006/main" xmlns:r="http://schemas.openxmlformats.org/officeDocument/2006/relationships">
+  <p:cSld>
+    <p:spTree>
+      <p:nvGrpSpPr>
+        <p:cNvPr id="1" name=""/>
+        <p:cNvGrpSpPr/>
+        <p:nvPr/>
+      </p:nvGrpSpPr>
+      <p:grpSpPr/>
+      <p:sp>
+        <p:nvSpPr>
+          <p:cNvPr id="2" name="Title 1"/>
+          <p:cNvSpPr>
+            <a:spLocks noGrp="1"/>
+          </p:cNvSpPr>
+          <p:nvPr>
+            <p:ph type="title"/>
+          </p:nvPr>
+        </p:nvSpPr>
+        <p:spPr/>
+        <p:txBody>
+          <a:bodyPr/>
+          <a:lstStyle/>
+          <a:p>
+            <a:r>
+              <a:t>Funcionalidades: Avaliação Multiobjetivo</a:t>
+            </a:r>
+          </a:p>
+        </p:txBody>
+      </p:sp>
+      <p:sp>
+        <p:nvSpPr>
+          <p:cNvPr id="3" name="Content Placeholder 2"/>
+          <p:cNvSpPr>
+            <a:spLocks noGrp="1"/>
+          </p:cNvSpPr>
+          <p:nvPr>
+            <p:ph idx="1"/>
+          </p:nvPr>
+        </p:nvSpPr>
+        <p:spPr/>
+        <p:txBody>
+          <a:bodyPr/>
+          <a:lstStyle/>
+          <a:p/>
+          <a:p>
+            <a:pPr>
+              <a:defRPr sz="2200"/>
+            </a:pPr>
+            <a:r>
+              <a:t>A Avaliação Multiobjetivo auxilia a seleção do modelo, viabilizando o balanço de métricas conflitantes.</a:t>
+            </a:r>
+          </a:p>
+          <a:p>
+            <a:pPr lvl="1">
+              <a:defRPr sz="2000"/>
+            </a:pPr>
+            <a:r>
+              <a:t>Fronteira de Pareto: O módulo plota um gráfico em duas dimensões explicitando as equações com base na Precisão vs Complexidade.</a:t>
+            </a:r>
+          </a:p>
+          <a:p>
+            <a:pPr lvl="1">
+              <a:defRPr sz="2000"/>
+            </a:pPr>
+            <a:r>
+              <a:t>Seleção Intuitiva: Permite ao usuário interagir visualmente com a distribuição populacional, facilitando a escolha da expressão.</a:t>
+            </a:r>
+          </a:p>
+        </p:txBody>
+      </p:sp>
+      <p:pic>
+        <p:nvPicPr>
+          <p:cNvPr id="4" name="Picture 3" descr="model_metrics_pareto.png"/>
+          <p:cNvPicPr>
+            <a:picLocks noChangeAspect="1"/>
+          </p:cNvPicPr>
+          <p:nvPr/>
+        </p:nvPicPr>
+        <p:blipFill>
+          <a:blip r:embed="rId2"/>
+          <a:stretch>
+            <a:fillRect/>
+          </a:stretch>
+        </p:blipFill>
+        <p:spPr>
+          <a:xfrm>
+            <a:off x="6400800" y="1828800"/>
+            <a:ext cx="4572000" cy="3176089"/>
+          </a:xfrm>
+          <a:prstGeom prst="rect">
+            <a:avLst/>
+          </a:prstGeom>
+        </p:spPr>
+      </p:pic>
+    </p:spTree>
+  </p:cSld>
+  <p:clrMapOvr>
+    <a:masterClrMapping/>
+  </p:clrMapOvr>
+</p:sld>
+</file>
+
+<file path=ppt/slides/slide27.xml><?xml version="1.0" encoding="utf-8"?>
+<p:sld xmlns:a="http://schemas.openxmlformats.org/drawingml/2006/main" xmlns:p="http://schemas.openxmlformats.org/presentationml/2006/main" xmlns:r="http://schemas.openxmlformats.org/officeDocument/2006/relationships">
+  <p:cSld>
+    <p:spTree>
+      <p:nvGrpSpPr>
+        <p:cNvPr id="1" name=""/>
+        <p:cNvGrpSpPr/>
+        <p:nvPr/>
+      </p:nvGrpSpPr>
+      <p:grpSpPr/>
+      <p:sp>
+        <p:nvSpPr>
+          <p:cNvPr id="2" name="Title 1"/>
+          <p:cNvSpPr>
+            <a:spLocks noGrp="1"/>
+          </p:cNvSpPr>
+          <p:nvPr>
+            <p:ph type="title"/>
+          </p:nvPr>
+        </p:nvSpPr>
+        <p:spPr/>
+        <p:txBody>
+          <a:bodyPr/>
+          <a:lstStyle/>
+          <a:p>
+            <a:r>
+              <a:t>Análise Comparativa de Modelos</a:t>
+            </a:r>
+          </a:p>
+        </p:txBody>
+      </p:sp>
+      <p:sp>
+        <p:nvSpPr>
+          <p:cNvPr id="3" name="Content Placeholder 2"/>
+          <p:cNvSpPr>
+            <a:spLocks noGrp="1"/>
+          </p:cNvSpPr>
+          <p:nvPr>
+            <p:ph idx="1"/>
+          </p:nvPr>
+        </p:nvSpPr>
+        <p:spPr/>
+        <p:txBody>
+          <a:bodyPr/>
+          <a:lstStyle/>
+          <a:p/>
+          <a:p>
+            <a:pPr lvl="1">
+              <a:defRPr sz="2000"/>
+            </a:pPr>
+            <a:r>
+              <a:t>Além da Fronteira de Pareto, o ambiente gráfico fornece painéis detalhados de validação lado a lado.</a:t>
+            </a:r>
+          </a:p>
+          <a:p>
+            <a:pPr lvl="1">
+              <a:defRPr sz="2000"/>
+            </a:pPr>
+            <a:r>
+              <a:t>O pesquisador ganha o poder de cruzar métricas de teste adicionais, validando a robustez dos modelos candidatos antes da sua exportação oficial, tudo no próprio navegador.</a:t>
+            </a:r>
+          </a:p>
+        </p:txBody>
+      </p:sp>
+      <p:pic>
+        <p:nvPicPr>
+          <p:cNvPr id="4" name="Picture 3" descr="model_metrics_comparison.png"/>
+          <p:cNvPicPr>
+            <a:picLocks noChangeAspect="1"/>
+          </p:cNvPicPr>
+          <p:nvPr/>
+        </p:nvPicPr>
+        <p:blipFill>
+          <a:blip r:embed="rId2"/>
+          <a:stretch>
+            <a:fillRect/>
+          </a:stretch>
+        </p:blipFill>
+        <p:spPr>
+          <a:xfrm>
+            <a:off x="6400800" y="1828800"/>
+            <a:ext cx="4572000" cy="2910516"/>
+          </a:xfrm>
+          <a:prstGeom prst="rect">
+            <a:avLst/>
+          </a:prstGeom>
+        </p:spPr>
+      </p:pic>
+    </p:spTree>
+  </p:cSld>
+  <p:clrMapOvr>
+    <a:masterClrMapping/>
+  </p:clrMapOvr>
+</p:sld>
+</file>
+
+<file path=ppt/slides/slide28.xml><?xml version="1.0" encoding="utf-8"?>
+<p:sld xmlns:a="http://schemas.openxmlformats.org/drawingml/2006/main" xmlns:p="http://schemas.openxmlformats.org/presentationml/2006/main" xmlns:r="http://schemas.openxmlformats.org/officeDocument/2006/relationships">
+  <p:cSld>
+    <p:spTree>
+      <p:nvGrpSpPr>
+        <p:cNvPr id="1" name=""/>
+        <p:cNvGrpSpPr/>
+        <p:nvPr/>
+      </p:nvGrpSpPr>
+      <p:grpSpPr/>
+      <p:sp>
+        <p:nvSpPr>
+          <p:cNvPr id="2" name="Title 1"/>
+          <p:cNvSpPr>
+            <a:spLocks noGrp="1"/>
+          </p:cNvSpPr>
+          <p:nvPr>
+            <p:ph type="title"/>
+          </p:nvPr>
+        </p:nvSpPr>
+        <p:spPr/>
+        <p:txBody>
+          <a:bodyPr/>
+          <a:lstStyle/>
+          <a:p>
+            <a:r>
+              <a:t>Comparação Analítica de Plataformas</a:t>
+            </a:r>
+          </a:p>
+        </p:txBody>
+      </p:sp>
+      <p:sp>
+        <p:nvSpPr>
+          <p:cNvPr id="3" name="Content Placeholder 2"/>
+          <p:cNvSpPr>
+            <a:spLocks noGrp="1"/>
+          </p:cNvSpPr>
+          <p:nvPr>
+            <p:ph idx="1"/>
+          </p:nvPr>
+        </p:nvSpPr>
+        <p:spPr/>
+        <p:txBody>
+          <a:bodyPr/>
+          <a:lstStyle/>
+          <a:p/>
+          <a:p>
+            <a:pPr>
+              <a:defRPr sz="2200"/>
+            </a:pPr>
+            <a:r>
+              <a:t>Comparação de funcionalidades essenciais para pesquisa em Regressão Simbólica.</a:t>
+            </a:r>
+          </a:p>
+        </p:txBody>
+      </p:sp>
+    </p:spTree>
+  </p:cSld>
+  <p:clrMapOvr>
+    <a:masterClrMapping/>
+  </p:clrMapOvr>
+</p:sld>
+</file>
+
+<file path=ppt/slides/slide29.xml><?xml version="1.0" encoding="utf-8"?>
+<p:sld xmlns:a="http://schemas.openxmlformats.org/drawingml/2006/main" xmlns:p="http://schemas.openxmlformats.org/presentationml/2006/main" xmlns:r="http://schemas.openxmlformats.org/officeDocument/2006/relationships">
+  <p:cSld>
+    <p:spTree>
+      <p:nvGrpSpPr>
+        <p:cNvPr id="1" name=""/>
+        <p:cNvGrpSpPr/>
+        <p:nvPr/>
+      </p:nvGrpSpPr>
+      <p:grpSpPr/>
+      <p:sp>
+        <p:nvSpPr>
+          <p:cNvPr id="2" name="Title 1"/>
+          <p:cNvSpPr>
+            <a:spLocks noGrp="1"/>
+          </p:cNvSpPr>
+          <p:nvPr>
+            <p:ph type="title"/>
+          </p:nvPr>
+        </p:nvSpPr>
+        <p:spPr/>
+        <p:txBody>
+          <a:bodyPr/>
+          <a:lstStyle/>
+          <a:p>
+            <a:r>
+              <a:t>Conclusão</a:t>
+            </a:r>
+          </a:p>
+        </p:txBody>
+      </p:sp>
+      <p:sp>
+        <p:nvSpPr>
+          <p:cNvPr id="3" name="Content Placeholder 2"/>
+          <p:cNvSpPr>
+            <a:spLocks noGrp="1"/>
+          </p:cNvSpPr>
+          <p:nvPr>
+            <p:ph idx="1"/>
+          </p:nvPr>
+        </p:nvSpPr>
+        <p:spPr/>
+        <p:txBody>
+          <a:bodyPr/>
+          <a:lstStyle/>
+          <a:p/>
+          <a:p>
+            <a:pPr lvl="1">
+              <a:defRPr sz="2000"/>
+            </a:pPr>
+            <a:r>
+              <a:t>A arquitetura distribuída do Spectrum provou que a transição de cargas pesadas para uma execução via filas destrava o treinamento exaustivo sem consumir o maquinário local do analista.</a:t>
+            </a:r>
+          </a:p>
+          <a:p>
+            <a:pPr lvl="1">
+              <a:defRPr sz="2000"/>
+            </a:pPr>
+            <a:r>
+              <a:t>A linguagem estruturada IQL quebra o modelo de observação estática de outras ferramentas, permitindo ao cientista a prospecção e extração guiada de regras específicas imersas nos e-graphs.</a:t>
+            </a:r>
+          </a:p>
+          <a:p>
+            <a:pPr lvl="1">
+              <a:defRPr sz="2000"/>
+            </a:pPr>
+            <a:r>
+              <a:t>Centralizar as visualizações otimizadas acopladas ao redator acadêmico agilizou com eficiência os fluxos metodológicos.</a:t>
+            </a:r>
+          </a:p>
+        </p:txBody>
+      </p:sp>
+    </p:spTree>
+  </p:cSld>
+  <p:clrMapOvr>
+    <a:masterClrMapping/>
+  </p:clrMapOvr>
+</p:sld>
+</file>
+
+<file path=ppt/slides/slide3.xml><?xml version="1.0" encoding="utf-8"?>
+<p:sld xmlns:a="http://schemas.openxmlformats.org/drawingml/2006/main" xmlns:p="http://schemas.openxmlformats.org/presentationml/2006/main" xmlns:r="http://schemas.openxmlformats.org/officeDocument/2006/relationships">
+  <p:cSld>
+    <p:spTree>
+      <p:nvGrpSpPr>
+        <p:cNvPr id="1" name=""/>
+        <p:cNvGrpSpPr/>
+        <p:nvPr/>
+      </p:nvGrpSpPr>
+      <p:grpSpPr/>
+      <p:sp>
+        <p:nvSpPr>
+          <p:cNvPr id="2" name="Title 1"/>
+          <p:cNvSpPr>
+            <a:spLocks noGrp="1"/>
+          </p:cNvSpPr>
+          <p:nvPr>
+            <p:ph type="title"/>
+          </p:nvPr>
+        </p:nvSpPr>
+        <p:spPr/>
+        <p:txBody>
+          <a:bodyPr/>
+          <a:lstStyle/>
+          <a:p>
+            <a:r>
+              <a:t>A Regressão Simbólica (SR)</a:t>
+            </a:r>
+          </a:p>
+        </p:txBody>
+      </p:sp>
+      <p:sp>
+        <p:nvSpPr>
+          <p:cNvPr id="3" name="Content Placeholder 2"/>
+          <p:cNvSpPr>
+            <a:spLocks noGrp="1"/>
+          </p:cNvSpPr>
+          <p:nvPr>
+            <p:ph idx="1"/>
+          </p:nvPr>
+        </p:nvSpPr>
+        <p:spPr/>
+        <p:txBody>
+          <a:bodyPr/>
+          <a:lstStyle/>
+          <a:p/>
+          <a:p>
+            <a:pPr>
+              <a:defRPr sz="2200"/>
+            </a:pPr>
+            <a:r>
+              <a:t>A Regressão Simbólica surge na área de IA evolutiva como a solução ideal para criar Modelos transparentes.</a:t>
+            </a:r>
+          </a:p>
+          <a:p>
+            <a:pPr lvl="1">
+              <a:defRPr sz="2000"/>
+            </a:pPr>
+            <a:r>
+              <a:t>Ao invés de apenas se ocupar em fazer predições, a SR busca evoluir e deduzir a equação matemática explícita f(x) por trás dos dados.</a:t>
+            </a:r>
+          </a:p>
+          <a:p>
+            <a:pPr lvl="1">
+              <a:defRPr sz="2000"/>
+            </a:pPr>
+            <a:r>
+              <a:t>Realiza uma busca livre e simultânea pela estrutura da equação matemática e pelos seus respectivos parâmetros numéricos, superando as limitações para a ciência das regressões polinomiais engessadas.</a:t>
+            </a:r>
+          </a:p>
+          <a:p>
+            <a:pPr lvl="1">
+              <a:defRPr sz="2000"/>
+            </a:pPr>
+            <a:r>
+              <a:t>Com a fórmula exposta em árvores (ASTs), os especialistas humanos podem analisar o resultado e corrigir falhas no modelo.</a:t>
+            </a:r>
+          </a:p>
+        </p:txBody>
+      </p:sp>
+    </p:spTree>
+  </p:cSld>
+  <p:clrMapOvr>
+    <a:masterClrMapping/>
+  </p:clrMapOvr>
+</p:sld>
+</file>
+
+<file path=ppt/slides/slide30.xml><?xml version="1.0" encoding="utf-8"?>
+<p:sld xmlns:a="http://schemas.openxmlformats.org/drawingml/2006/main" xmlns:p="http://schemas.openxmlformats.org/presentationml/2006/main" xmlns:r="http://schemas.openxmlformats.org/officeDocument/2006/relationships">
+  <p:cSld>
+    <p:spTree>
+      <p:nvGrpSpPr>
+        <p:cNvPr id="1" name=""/>
+        <p:cNvGrpSpPr/>
+        <p:nvPr/>
+      </p:nvGrpSpPr>
+      <p:grpSpPr/>
+      <p:sp>
+        <p:nvSpPr>
+          <p:cNvPr id="2" name="Title 1"/>
+          <p:cNvSpPr>
+            <a:spLocks noGrp="1"/>
+          </p:cNvSpPr>
+          <p:nvPr>
+            <p:ph type="title"/>
+          </p:nvPr>
+        </p:nvSpPr>
+        <p:spPr/>
+        <p:txBody>
+          <a:bodyPr/>
+          <a:lstStyle/>
+          <a:p>
+            <a:r>
+              <a:t>Trabalhos Futuros</a:t>
+            </a:r>
+          </a:p>
+        </p:txBody>
+      </p:sp>
+      <p:sp>
+        <p:nvSpPr>
+          <p:cNvPr id="3" name="Content Placeholder 2"/>
+          <p:cNvSpPr>
+            <a:spLocks noGrp="1"/>
+          </p:cNvSpPr>
+          <p:nvPr>
+            <p:ph idx="1"/>
+          </p:nvPr>
+        </p:nvSpPr>
+        <p:spPr/>
+        <p:txBody>
+          <a:bodyPr/>
+          <a:lstStyle/>
+          <a:p/>
+          <a:p>
+            <a:pPr lvl="1">
+              <a:defRPr sz="2000"/>
+            </a:pPr>
+            <a:r>
+              <a:t>Resiliência de Rede: Implantar o padrão arquitetural estrito no código do backend para garantir que nenhum processo se perca.</a:t>
+            </a:r>
+          </a:p>
+          <a:p>
+            <a:pPr lvl="1">
+              <a:defRPr sz="2000"/>
+            </a:pPr>
+            <a:r>
+              <a:t>Suporte Estendido: Possibilitar a integração opcional da camada de treinamento para interligar as execuções IQL aos motores otimizados em C++ (ex. PySR).</a:t>
+            </a:r>
+          </a:p>
+          <a:p>
+            <a:pPr lvl="1">
+              <a:defRPr sz="2000"/>
+            </a:pPr>
+            <a:r>
+              <a:t>Tipagens Textuais Avançadas: Expandir o processador de dados para abranger e validar representações em texto, provindas da computação através de embeddings numéricos.</a:t>
+            </a:r>
+          </a:p>
+        </p:txBody>
+      </p:sp>
+    </p:spTree>
+  </p:cSld>
+  <p:clrMapOvr>
+    <a:masterClrMapping/>
+  </p:clrMapOvr>
+</p:sld>
+</file>
+
+<file path=ppt/slides/slide31.xml><?xml version="1.0" encoding="utf-8"?>
+<p:sld xmlns:a="http://schemas.openxmlformats.org/drawingml/2006/main" xmlns:p="http://schemas.openxmlformats.org/presentationml/2006/main" xmlns:r="http://schemas.openxmlformats.org/officeDocument/2006/relationships">
+  <p:cSld>
+    <p:spTree>
+      <p:nvGrpSpPr>
+        <p:cNvPr id="1" name=""/>
+        <p:cNvGrpSpPr/>
+        <p:nvPr/>
+      </p:nvGrpSpPr>
+      <p:grpSpPr/>
+      <p:sp>
+        <p:nvSpPr>
+          <p:cNvPr id="2" name="Title 1"/>
+          <p:cNvSpPr>
+            <a:spLocks noGrp="1"/>
+          </p:cNvSpPr>
+          <p:nvPr>
+            <p:ph type="title"/>
+          </p:nvPr>
+        </p:nvSpPr>
+        <p:spPr/>
+        <p:txBody>
+          <a:bodyPr/>
+          <a:lstStyle/>
+          <a:p>
+            <a:r>
+              <a:t>Perguntas?</a:t>
+            </a:r>
+          </a:p>
+        </p:txBody>
+      </p:sp>
+      <p:sp>
+        <p:nvSpPr>
+          <p:cNvPr id="3" name="Content Placeholder 2"/>
+          <p:cNvSpPr>
+            <a:spLocks noGrp="1"/>
+          </p:cNvSpPr>
+          <p:nvPr>
+            <p:ph idx="1"/>
+          </p:nvPr>
+        </p:nvSpPr>
+        <p:spPr/>
+        <p:txBody>
+          <a:bodyPr/>
+          <a:lstStyle/>
+          <a:p/>
+        </p:txBody>
+      </p:sp>
+    </p:spTree>
+  </p:cSld>
+  <p:clrMapOvr>
+    <a:masterClrMapping/>
+  </p:clrMapOvr>
+</p:sld>
+</file>
+
+<file path=ppt/slides/slide4.xml><?xml version="1.0" encoding="utf-8"?>
+<p:sld xmlns:a="http://schemas.openxmlformats.org/drawingml/2006/main" xmlns:p="http://schemas.openxmlformats.org/presentationml/2006/main" xmlns:r="http://schemas.openxmlformats.org/officeDocument/2006/relationships">
+  <p:cSld>
+    <p:spTree>
+      <p:nvGrpSpPr>
+        <p:cNvPr id="1" name=""/>
+        <p:cNvGrpSpPr/>
+        <p:nvPr/>
+      </p:nvGrpSpPr>
+      <p:grpSpPr/>
+      <p:sp>
+        <p:nvSpPr>
+          <p:cNvPr id="2" name="Title 1"/>
+          <p:cNvSpPr>
+            <a:spLocks noGrp="1"/>
+          </p:cNvSpPr>
+          <p:nvPr>
+            <p:ph type="title"/>
+          </p:nvPr>
+        </p:nvSpPr>
+        <p:spPr/>
+        <p:txBody>
+          <a:bodyPr/>
+          <a:lstStyle/>
+          <a:p>
+            <a:r>
+              <a:t>O Fluxo do Algoritmo Genético - Etapa 1</a:t>
+            </a:r>
+          </a:p>
+        </p:txBody>
+      </p:sp>
+      <p:sp>
+        <p:nvSpPr>
+          <p:cNvPr id="3" name="TextBox 2"/>
+          <p:cNvSpPr txBox="1"/>
+          <p:nvPr/>
+        </p:nvSpPr>
+        <p:spPr>
+          <a:xfrm>
+            <a:off x="914400" y="1371600"/>
+            <a:ext cx="10058400" cy="914400"/>
+          </a:xfrm>
+          <a:prstGeom prst="rect">
+            <a:avLst/>
+          </a:prstGeom>
+          <a:noFill/>
+        </p:spPr>
+        <p:txBody>
+          <a:bodyPr wrap="square">
+            <a:spAutoFit/>
+          </a:bodyPr>
+          <a:lstStyle/>
+          <a:p/>
+          <a:p>
+            <a:pPr>
+              <a:defRPr sz="2400"/>
+            </a:pPr>
+            <a:r>
+              <a:t>1. População Inicial: Um conjunto de indivíduos contendo árvores sintáticas (AST) é inicializado e sua aptidão de validação avaliada (ex. MSE).</a:t>
+            </a:r>
+          </a:p>
+        </p:txBody>
+      </p:sp>
+      <p:pic>
+        <p:nvPicPr>
+          <p:cNvPr id="4" name="Picture 3" descr="ga_step_1.png"/>
+          <p:cNvPicPr>
+            <a:picLocks noChangeAspect="1"/>
+          </p:cNvPicPr>
+          <p:nvPr/>
+        </p:nvPicPr>
+        <p:blipFill>
+          <a:blip r:embed="rId2"/>
+          <a:stretch>
+            <a:fillRect/>
+          </a:stretch>
+        </p:blipFill>
+        <p:spPr>
+          <a:xfrm>
+            <a:off x="2286000" y="2743200"/>
+            <a:ext cx="7315200" cy="2725947"/>
+          </a:xfrm>
+          <a:prstGeom prst="rect">
+            <a:avLst/>
+          </a:prstGeom>
+        </p:spPr>
+      </p:pic>
+    </p:spTree>
+  </p:cSld>
+  <p:clrMapOvr>
+    <a:masterClrMapping/>
+  </p:clrMapOvr>
+</p:sld>
+</file>
+
+<file path=ppt/slides/slide5.xml><?xml version="1.0" encoding="utf-8"?>
+<p:sld xmlns:a="http://schemas.openxmlformats.org/drawingml/2006/main" xmlns:p="http://schemas.openxmlformats.org/presentationml/2006/main" xmlns:r="http://schemas.openxmlformats.org/officeDocument/2006/relationships">
+  <p:cSld>
+    <p:spTree>
+      <p:nvGrpSpPr>
+        <p:cNvPr id="1" name=""/>
+        <p:cNvGrpSpPr/>
+        <p:nvPr/>
+      </p:nvGrpSpPr>
+      <p:grpSpPr/>
+      <p:sp>
+        <p:nvSpPr>
+          <p:cNvPr id="2" name="Title 1"/>
+          <p:cNvSpPr>
+            <a:spLocks noGrp="1"/>
+          </p:cNvSpPr>
+          <p:nvPr>
+            <p:ph type="title"/>
+          </p:nvPr>
+        </p:nvSpPr>
+        <p:spPr/>
+        <p:txBody>
+          <a:bodyPr/>
+          <a:lstStyle/>
+          <a:p>
+            <a:r>
+              <a:t>O Fluxo do Algoritmo Genético - Etapa 2</a:t>
+            </a:r>
+          </a:p>
+        </p:txBody>
+      </p:sp>
+      <p:sp>
+        <p:nvSpPr>
+          <p:cNvPr id="3" name="TextBox 2"/>
+          <p:cNvSpPr txBox="1"/>
+          <p:nvPr/>
+        </p:nvSpPr>
+        <p:spPr>
+          <a:xfrm>
+            <a:off x="914400" y="1371600"/>
+            <a:ext cx="10058400" cy="914400"/>
+          </a:xfrm>
+          <a:prstGeom prst="rect">
+            <a:avLst/>
+          </a:prstGeom>
+          <a:noFill/>
+        </p:spPr>
+        <p:txBody>
+          <a:bodyPr wrap="square">
+            <a:spAutoFit/>
+          </a:bodyPr>
+          <a:lstStyle/>
+          <a:p/>
+          <a:p>
+            <a:pPr>
+              <a:defRPr sz="2400"/>
+            </a:pPr>
+            <a:r>
+              <a:t>2. Seleção: Os indivíduos que apresentam os melhores resultados de aptidão e menor número de nós (parcimônia) são selecionados para cruzamento.</a:t>
+            </a:r>
+          </a:p>
+        </p:txBody>
+      </p:sp>
+      <p:pic>
+        <p:nvPicPr>
+          <p:cNvPr id="4" name="Picture 3" descr="ga_step_2.png"/>
+          <p:cNvPicPr>
+            <a:picLocks noChangeAspect="1"/>
+          </p:cNvPicPr>
+          <p:nvPr/>
+        </p:nvPicPr>
+        <p:blipFill>
+          <a:blip r:embed="rId2"/>
+          <a:stretch>
+            <a:fillRect/>
+          </a:stretch>
+        </p:blipFill>
+        <p:spPr>
+          <a:xfrm>
+            <a:off x="2286000" y="2743200"/>
+            <a:ext cx="7315200" cy="2725947"/>
+          </a:xfrm>
+          <a:prstGeom prst="rect">
+            <a:avLst/>
+          </a:prstGeom>
+        </p:spPr>
+      </p:pic>
+    </p:spTree>
+  </p:cSld>
+  <p:clrMapOvr>
+    <a:masterClrMapping/>
+  </p:clrMapOvr>
+</p:sld>
+</file>
+
+<file path=ppt/slides/slide6.xml><?xml version="1.0" encoding="utf-8"?>
+<p:sld xmlns:a="http://schemas.openxmlformats.org/drawingml/2006/main" xmlns:p="http://schemas.openxmlformats.org/presentationml/2006/main" xmlns:r="http://schemas.openxmlformats.org/officeDocument/2006/relationships">
+  <p:cSld>
+    <p:spTree>
+      <p:nvGrpSpPr>
+        <p:cNvPr id="1" name=""/>
+        <p:cNvGrpSpPr/>
+        <p:nvPr/>
+      </p:nvGrpSpPr>
+      <p:grpSpPr/>
+      <p:sp>
+        <p:nvSpPr>
+          <p:cNvPr id="2" name="Title 1"/>
+          <p:cNvSpPr>
+            <a:spLocks noGrp="1"/>
+          </p:cNvSpPr>
+          <p:nvPr>
+            <p:ph type="title"/>
+          </p:nvPr>
+        </p:nvSpPr>
+        <p:spPr/>
+        <p:txBody>
+          <a:bodyPr/>
+          <a:lstStyle/>
+          <a:p>
+            <a:r>
               <a:t>O Fluxo do Algoritmo Genético - Etapa 3</a:t>
             </a:r>
           </a:p>
@@ -3286,7 +5637,7 @@
 </p:sld>
 </file>
 
-<file path=ppt/slides/slide11.xml><?xml version="1.0" encoding="utf-8"?>
+<file path=ppt/slides/slide7.xml><?xml version="1.0" encoding="utf-8"?>
 <p:sld xmlns:a="http://schemas.openxmlformats.org/drawingml/2006/main" xmlns:p="http://schemas.openxmlformats.org/presentationml/2006/main" xmlns:r="http://schemas.openxmlformats.org/officeDocument/2006/relationships">
   <p:cSld>
     <p:spTree>
@@ -3381,2626 +5732,6 @@
 </p:sld>
 </file>
 
-<file path=ppt/slides/slide12.xml><?xml version="1.0" encoding="utf-8"?>
-<p:sld xmlns:a="http://schemas.openxmlformats.org/drawingml/2006/main" xmlns:p="http://schemas.openxmlformats.org/presentationml/2006/main" xmlns:r="http://schemas.openxmlformats.org/officeDocument/2006/relationships">
-  <p:cSld>
-    <p:spTree>
-      <p:nvGrpSpPr>
-        <p:cNvPr id="1" name=""/>
-        <p:cNvGrpSpPr/>
-        <p:nvPr/>
-      </p:nvGrpSpPr>
-      <p:grpSpPr/>
-      <p:sp>
-        <p:nvSpPr>
-          <p:cNvPr id="2" name="Title 1"/>
-          <p:cNvSpPr>
-            <a:spLocks noGrp="1"/>
-          </p:cNvSpPr>
-          <p:nvPr>
-            <p:ph type="title"/>
-          </p:nvPr>
-        </p:nvSpPr>
-        <p:spPr/>
-        <p:txBody>
-          <a:bodyPr/>
-          <a:lstStyle/>
-          <a:p>
-            <a:r>
-              <a:t>O Preço da Interpretabilidade</a:t>
-            </a:r>
-          </a:p>
-        </p:txBody>
-      </p:sp>
-      <p:sp>
-        <p:nvSpPr>
-          <p:cNvPr id="3" name="Content Placeholder 2"/>
-          <p:cNvSpPr>
-            <a:spLocks noGrp="1"/>
-          </p:cNvSpPr>
-          <p:nvPr>
-            <p:ph idx="1"/>
-          </p:nvPr>
-        </p:nvSpPr>
-        <p:spPr/>
-        <p:txBody>
-          <a:bodyPr/>
-          <a:lstStyle/>
-          <a:p/>
-          <a:p>
-            <a:pPr>
-              <a:defRPr sz="2200"/>
-            </a:pPr>
-            <a:r>
-              <a:t>Apesar de seus imensos benefícios, a Regressão Simbólica ainda não domina o mercado devido ao seu altíssimo custo computacional de treinamento:</a:t>
-            </a:r>
-          </a:p>
-          <a:p>
-            <a:pPr>
-              <a:defRPr sz="2200"/>
-            </a:pPr>
-            <a:r>
-              <a:t>O elevado número de expressões sintáticas geradas pelos operadores de mutação cresce de forma exponencial a cada geração evolutiva.</a:t>
-            </a:r>
-          </a:p>
-          <a:p>
-            <a:pPr>
-              <a:defRPr sz="2200"/>
-            </a:pPr>
-            <a:r>
-              <a:t>O modelo acaba processando infinitas fórmulas com aparências diferentes, mas que matematicamente dizem a mesma coisa (ex: x + x e 2 \cdot x).</a:t>
-            </a:r>
-          </a:p>
-          <a:p>
-            <a:pPr>
-              <a:defRPr sz="2200"/>
-            </a:pPr>
-            <a:r>
-              <a:t>O custo repetitivo de calcular a aptidão para um elevado número de equações esgota rapidamente a viabilidade de execução em recursos computacionais limitados.</a:t>
-            </a:r>
-          </a:p>
-        </p:txBody>
-      </p:sp>
-    </p:spTree>
-  </p:cSld>
-  <p:clrMapOvr>
-    <a:masterClrMapping/>
-  </p:clrMapOvr>
-</p:sld>
-</file>
-
-<file path=ppt/slides/slide13.xml><?xml version="1.0" encoding="utf-8"?>
-<p:sld xmlns:a="http://schemas.openxmlformats.org/drawingml/2006/main" xmlns:p="http://schemas.openxmlformats.org/presentationml/2006/main" xmlns:r="http://schemas.openxmlformats.org/officeDocument/2006/relationships">
-  <p:cSld>
-    <p:spTree>
-      <p:nvGrpSpPr>
-        <p:cNvPr id="1" name=""/>
-        <p:cNvGrpSpPr/>
-        <p:nvPr/>
-      </p:nvGrpSpPr>
-      <p:grpSpPr/>
-      <p:sp>
-        <p:nvSpPr>
-          <p:cNvPr id="2" name="Title 1"/>
-          <p:cNvSpPr>
-            <a:spLocks noGrp="1"/>
-          </p:cNvSpPr>
-          <p:nvPr>
-            <p:ph type="title"/>
-          </p:nvPr>
-        </p:nvSpPr>
-        <p:spPr/>
-        <p:txBody>
-          <a:bodyPr/>
-          <a:lstStyle/>
-          <a:p>
-            <a:r>
-              <a:t>Grafos de Igualdade (E-graphs)</a:t>
-            </a:r>
-          </a:p>
-        </p:txBody>
-      </p:sp>
-      <p:sp>
-        <p:nvSpPr>
-          <p:cNvPr id="3" name="Content Placeholder 2"/>
-          <p:cNvSpPr>
-            <a:spLocks noGrp="1"/>
-          </p:cNvSpPr>
-          <p:nvPr>
-            <p:ph idx="1"/>
-          </p:nvPr>
-        </p:nvSpPr>
-        <p:spPr/>
-        <p:txBody>
-          <a:bodyPr/>
-          <a:lstStyle/>
-          <a:p/>
-          <a:p>
-            <a:pPr>
-              <a:defRPr sz="2200"/>
-            </a:pPr>
-            <a:r>
-              <a:t>Estruturas de dados matemáticas capazes de armazenar e compactar múltiplas expressões equivalentes de forma altamente eficiente.</a:t>
-            </a:r>
-          </a:p>
-          <a:p>
-            <a:pPr lvl="1">
-              <a:defRPr sz="2000"/>
-            </a:pPr>
-            <a:r>
-              <a:t>Classes de Equivalência (e-classes): Conjuntos de expressões logicamente equivalentes são agrupados em nós compartilhados (e-nodes).</a:t>
-            </a:r>
-          </a:p>
-          <a:p>
-            <a:pPr lvl="1">
-              <a:defRPr sz="2000"/>
-            </a:pPr>
-            <a:r>
-              <a:t>Saturação de Igualdade: O processo de aplicar regras de reescrita contínuas para explorar e agrupar novas representações matemáticas equivalentes no grafo.</a:t>
-            </a:r>
-          </a:p>
-          <a:p>
-            <a:pPr>
-              <a:defRPr sz="2200"/>
-            </a:pPr>
-            <a:r>
-              <a:t>Algoritmos modernos de regressão simbólica, como o eggp, executam as operações de mutação e cruzamento genético de forma otimizada diretamente na estrutura dos grafos de igualdade, minimizando redundâncias estruturais e economizando drasticamente alocação de memória na busca.</a:t>
-            </a:r>
-          </a:p>
-        </p:txBody>
-      </p:sp>
-    </p:spTree>
-  </p:cSld>
-  <p:clrMapOvr>
-    <a:masterClrMapping/>
-  </p:clrMapOvr>
-</p:sld>
-</file>
-
-<file path=ppt/slides/slide14.xml><?xml version="1.0" encoding="utf-8"?>
-<p:sld xmlns:a="http://schemas.openxmlformats.org/drawingml/2006/main" xmlns:p="http://schemas.openxmlformats.org/presentationml/2006/main" xmlns:r="http://schemas.openxmlformats.org/officeDocument/2006/relationships">
-  <p:cSld>
-    <p:spTree>
-      <p:nvGrpSpPr>
-        <p:cNvPr id="1" name=""/>
-        <p:cNvGrpSpPr/>
-        <p:nvPr/>
-      </p:nvGrpSpPr>
-      <p:grpSpPr/>
-      <p:sp>
-        <p:nvSpPr>
-          <p:cNvPr id="2" name="Title 1"/>
-          <p:cNvSpPr>
-            <a:spLocks noGrp="1"/>
-          </p:cNvSpPr>
-          <p:nvPr>
-            <p:ph type="title"/>
-          </p:nvPr>
-        </p:nvSpPr>
-        <p:spPr/>
-        <p:txBody>
-          <a:bodyPr/>
-          <a:lstStyle/>
-          <a:p>
-            <a:r>
-              <a:t>Compressão Estrutural Massiva</a:t>
-            </a:r>
-          </a:p>
-        </p:txBody>
-      </p:sp>
-      <p:sp>
-        <p:nvSpPr>
-          <p:cNvPr id="3" name="Content Placeholder 2"/>
-          <p:cNvSpPr>
-            <a:spLocks noGrp="1"/>
-          </p:cNvSpPr>
-          <p:nvPr>
-            <p:ph idx="1"/>
-          </p:nvPr>
-        </p:nvSpPr>
-        <p:spPr/>
-        <p:txBody>
-          <a:bodyPr/>
-          <a:lstStyle/>
-          <a:p/>
-          <a:p>
-            <a:pPr>
-              <a:defRPr sz="2200"/>
-            </a:pPr>
-            <a:r>
-              <a:t>Na prática, as regras algébricas do E-graph agrupam milhares de e-classes, criando uma teia altamente densa capaz de representar infinitas equações.</a:t>
-            </a:r>
-          </a:p>
-          <a:p>
-            <a:pPr>
-              <a:defRPr sz="2200"/>
-            </a:pPr>
-            <a:r>
-              <a:t>Raio-x topológico de um E-graph após rodar o treinamento.</a:t>
-            </a:r>
-          </a:p>
-        </p:txBody>
-      </p:sp>
-      <p:pic>
-        <p:nvPicPr>
-          <p:cNvPr id="4" name="Picture 3" descr="egraph.png"/>
-          <p:cNvPicPr>
-            <a:picLocks noChangeAspect="1"/>
-          </p:cNvPicPr>
-          <p:nvPr/>
-        </p:nvPicPr>
-        <p:blipFill>
-          <a:blip r:embed="rId2"/>
-          <a:stretch>
-            <a:fillRect/>
-          </a:stretch>
-        </p:blipFill>
-        <p:spPr>
-          <a:xfrm>
-            <a:off x="6400800" y="1828800"/>
-            <a:ext cx="4572000" cy="3755631"/>
-          </a:xfrm>
-          <a:prstGeom prst="rect">
-            <a:avLst/>
-          </a:prstGeom>
-        </p:spPr>
-      </p:pic>
-    </p:spTree>
-  </p:cSld>
-  <p:clrMapOvr>
-    <a:masterClrMapping/>
-  </p:clrMapOvr>
-</p:sld>
-</file>
-
-<file path=ppt/slides/slide15.xml><?xml version="1.0" encoding="utf-8"?>
-<p:sld xmlns:a="http://schemas.openxmlformats.org/drawingml/2006/main" xmlns:p="http://schemas.openxmlformats.org/presentationml/2006/main" xmlns:r="http://schemas.openxmlformats.org/officeDocument/2006/relationships">
-  <p:cSld>
-    <p:spTree>
-      <p:nvGrpSpPr>
-        <p:cNvPr id="1" name=""/>
-        <p:cNvGrpSpPr/>
-        <p:nvPr/>
-      </p:nvGrpSpPr>
-      <p:grpSpPr/>
-      <p:sp>
-        <p:nvSpPr>
-          <p:cNvPr id="2" name="Title 1"/>
-          <p:cNvSpPr>
-            <a:spLocks noGrp="1"/>
-          </p:cNvSpPr>
-          <p:nvPr>
-            <p:ph type="title"/>
-          </p:nvPr>
-        </p:nvSpPr>
-        <p:spPr/>
-        <p:txBody>
-          <a:bodyPr/>
-          <a:lstStyle/>
-          <a:p>
-            <a:r>
-              <a:t>A Dinâmica Interativa dos E-graphs - Etapa 1</a:t>
-            </a:r>
-          </a:p>
-        </p:txBody>
-      </p:sp>
-      <p:sp>
-        <p:nvSpPr>
-          <p:cNvPr id="3" name="TextBox 2"/>
-          <p:cNvSpPr txBox="1"/>
-          <p:nvPr/>
-        </p:nvSpPr>
-        <p:spPr>
-          <a:xfrm>
-            <a:off x="914400" y="1371600"/>
-            <a:ext cx="10058400" cy="914400"/>
-          </a:xfrm>
-          <a:prstGeom prst="rect">
-            <a:avLst/>
-          </a:prstGeom>
-          <a:noFill/>
-        </p:spPr>
-        <p:txBody>
-          <a:bodyPr wrap="square">
-            <a:spAutoFit/>
-          </a:bodyPr>
-          <a:lstStyle/>
-          <a:p/>
-          <a:p>
-            <a:pPr>
-              <a:defRPr sz="2400"/>
-            </a:pPr>
-            <a:r>
-              <a:t>1. Inclusão: Expressões matemáticas base como x * 2 e x + x são instanciadas, formando e-classes independentes.</a:t>
-            </a:r>
-          </a:p>
-        </p:txBody>
-      </p:sp>
-      <p:pic>
-        <p:nvPicPr>
-          <p:cNvPr id="4" name="Picture 3" descr="egraph_step_1.png"/>
-          <p:cNvPicPr>
-            <a:picLocks noChangeAspect="1"/>
-          </p:cNvPicPr>
-          <p:nvPr/>
-        </p:nvPicPr>
-        <p:blipFill>
-          <a:blip r:embed="rId2"/>
-          <a:stretch>
-            <a:fillRect/>
-          </a:stretch>
-        </p:blipFill>
-        <p:spPr>
-          <a:xfrm>
-            <a:off x="2286000" y="2743200"/>
-            <a:ext cx="7315200" cy="2898475"/>
-          </a:xfrm>
-          <a:prstGeom prst="rect">
-            <a:avLst/>
-          </a:prstGeom>
-        </p:spPr>
-      </p:pic>
-    </p:spTree>
-  </p:cSld>
-  <p:clrMapOvr>
-    <a:masterClrMapping/>
-  </p:clrMapOvr>
-</p:sld>
-</file>
-
-<file path=ppt/slides/slide16.xml><?xml version="1.0" encoding="utf-8"?>
-<p:sld xmlns:a="http://schemas.openxmlformats.org/drawingml/2006/main" xmlns:p="http://schemas.openxmlformats.org/presentationml/2006/main" xmlns:r="http://schemas.openxmlformats.org/officeDocument/2006/relationships">
-  <p:cSld>
-    <p:spTree>
-      <p:nvGrpSpPr>
-        <p:cNvPr id="1" name=""/>
-        <p:cNvGrpSpPr/>
-        <p:nvPr/>
-      </p:nvGrpSpPr>
-      <p:grpSpPr/>
-      <p:sp>
-        <p:nvSpPr>
-          <p:cNvPr id="2" name="Title 1"/>
-          <p:cNvSpPr>
-            <a:spLocks noGrp="1"/>
-          </p:cNvSpPr>
-          <p:nvPr>
-            <p:ph type="title"/>
-          </p:nvPr>
-        </p:nvSpPr>
-        <p:spPr/>
-        <p:txBody>
-          <a:bodyPr/>
-          <a:lstStyle/>
-          <a:p>
-            <a:r>
-              <a:t>A Dinâmica Interativa dos E-graphs - Etapa 2</a:t>
-            </a:r>
-          </a:p>
-        </p:txBody>
-      </p:sp>
-      <p:sp>
-        <p:nvSpPr>
-          <p:cNvPr id="3" name="TextBox 2"/>
-          <p:cNvSpPr txBox="1"/>
-          <p:nvPr/>
-        </p:nvSpPr>
-        <p:spPr>
-          <a:xfrm>
-            <a:off x="914400" y="1371600"/>
-            <a:ext cx="10058400" cy="914400"/>
-          </a:xfrm>
-          <a:prstGeom prst="rect">
-            <a:avLst/>
-          </a:prstGeom>
-          <a:noFill/>
-        </p:spPr>
-        <p:txBody>
-          <a:bodyPr wrap="square">
-            <a:spAutoFit/>
-          </a:bodyPr>
-          <a:lstStyle/>
-          <a:p/>
-          <a:p>
-            <a:pPr>
-              <a:defRPr sz="2400"/>
-            </a:pPr>
-            <a:r>
-              <a:t>2. Reescrita: As regras de reescrita são aplicadas, conectando e-classes distintas com base em equivalências matemáticas (ex. a * 2 = a + a).</a:t>
-            </a:r>
-          </a:p>
-        </p:txBody>
-      </p:sp>
-      <p:pic>
-        <p:nvPicPr>
-          <p:cNvPr id="4" name="Picture 3" descr="egraph_step_2.png"/>
-          <p:cNvPicPr>
-            <a:picLocks noChangeAspect="1"/>
-          </p:cNvPicPr>
-          <p:nvPr/>
-        </p:nvPicPr>
-        <p:blipFill>
-          <a:blip r:embed="rId2"/>
-          <a:stretch>
-            <a:fillRect/>
-          </a:stretch>
-        </p:blipFill>
-        <p:spPr>
-          <a:xfrm>
-            <a:off x="2286000" y="2743200"/>
-            <a:ext cx="7315200" cy="2898475"/>
-          </a:xfrm>
-          <a:prstGeom prst="rect">
-            <a:avLst/>
-          </a:prstGeom>
-        </p:spPr>
-      </p:pic>
-    </p:spTree>
-  </p:cSld>
-  <p:clrMapOvr>
-    <a:masterClrMapping/>
-  </p:clrMapOvr>
-</p:sld>
-</file>
-
-<file path=ppt/slides/slide17.xml><?xml version="1.0" encoding="utf-8"?>
-<p:sld xmlns:a="http://schemas.openxmlformats.org/drawingml/2006/main" xmlns:p="http://schemas.openxmlformats.org/presentationml/2006/main" xmlns:r="http://schemas.openxmlformats.org/officeDocument/2006/relationships">
-  <p:cSld>
-    <p:spTree>
-      <p:nvGrpSpPr>
-        <p:cNvPr id="1" name=""/>
-        <p:cNvGrpSpPr/>
-        <p:nvPr/>
-      </p:nvGrpSpPr>
-      <p:grpSpPr/>
-      <p:sp>
-        <p:nvSpPr>
-          <p:cNvPr id="2" name="Title 1"/>
-          <p:cNvSpPr>
-            <a:spLocks noGrp="1"/>
-          </p:cNvSpPr>
-          <p:nvPr>
-            <p:ph type="title"/>
-          </p:nvPr>
-        </p:nvSpPr>
-        <p:spPr/>
-        <p:txBody>
-          <a:bodyPr/>
-          <a:lstStyle/>
-          <a:p>
-            <a:r>
-              <a:t>A Dinâmica Interativa dos E-graphs - Etapa 3</a:t>
-            </a:r>
-          </a:p>
-        </p:txBody>
-      </p:sp>
-      <p:sp>
-        <p:nvSpPr>
-          <p:cNvPr id="3" name="TextBox 2"/>
-          <p:cNvSpPr txBox="1"/>
-          <p:nvPr/>
-        </p:nvSpPr>
-        <p:spPr>
-          <a:xfrm>
-            <a:off x="914400" y="1371600"/>
-            <a:ext cx="10058400" cy="914400"/>
-          </a:xfrm>
-          <a:prstGeom prst="rect">
-            <a:avLst/>
-          </a:prstGeom>
-          <a:noFill/>
-        </p:spPr>
-        <p:txBody>
-          <a:bodyPr wrap="square">
-            <a:spAutoFit/>
-          </a:bodyPr>
-          <a:lstStyle/>
-          <a:p/>
-          <a:p>
-            <a:pPr>
-              <a:defRPr sz="2400"/>
-            </a:pPr>
-            <a:r>
-              <a:t>3. Saturação de Igualdade: As equivalências sofrem fusão, englobando os e-nodes em uma única estrutura representacional.</a:t>
-            </a:r>
-          </a:p>
-        </p:txBody>
-      </p:sp>
-      <p:pic>
-        <p:nvPicPr>
-          <p:cNvPr id="4" name="Picture 3" descr="egraph_step_3.png"/>
-          <p:cNvPicPr>
-            <a:picLocks noChangeAspect="1"/>
-          </p:cNvPicPr>
-          <p:nvPr/>
-        </p:nvPicPr>
-        <p:blipFill>
-          <a:blip r:embed="rId2"/>
-          <a:stretch>
-            <a:fillRect/>
-          </a:stretch>
-        </p:blipFill>
-        <p:spPr>
-          <a:xfrm>
-            <a:off x="2286000" y="2743200"/>
-            <a:ext cx="7315200" cy="2891574"/>
-          </a:xfrm>
-          <a:prstGeom prst="rect">
-            <a:avLst/>
-          </a:prstGeom>
-        </p:spPr>
-      </p:pic>
-    </p:spTree>
-  </p:cSld>
-  <p:clrMapOvr>
-    <a:masterClrMapping/>
-  </p:clrMapOvr>
-</p:sld>
-</file>
-
-<file path=ppt/slides/slide18.xml><?xml version="1.0" encoding="utf-8"?>
-<p:sld xmlns:a="http://schemas.openxmlformats.org/drawingml/2006/main" xmlns:p="http://schemas.openxmlformats.org/presentationml/2006/main" xmlns:r="http://schemas.openxmlformats.org/officeDocument/2006/relationships">
-  <p:cSld>
-    <p:spTree>
-      <p:nvGrpSpPr>
-        <p:cNvPr id="1" name=""/>
-        <p:cNvGrpSpPr/>
-        <p:nvPr/>
-      </p:nvGrpSpPr>
-      <p:grpSpPr/>
-      <p:sp>
-        <p:nvSpPr>
-          <p:cNvPr id="2" name="Title 1"/>
-          <p:cNvSpPr>
-            <a:spLocks noGrp="1"/>
-          </p:cNvSpPr>
-          <p:nvPr>
-            <p:ph type="title"/>
-          </p:nvPr>
-        </p:nvSpPr>
-        <p:spPr/>
-        <p:txBody>
-          <a:bodyPr/>
-          <a:lstStyle/>
-          <a:p>
-            <a:r>
-              <a:t>A Dinâmica Interativa dos E-graphs - Etapa 4</a:t>
-            </a:r>
-          </a:p>
-        </p:txBody>
-      </p:sp>
-      <p:sp>
-        <p:nvSpPr>
-          <p:cNvPr id="3" name="TextBox 2"/>
-          <p:cNvSpPr txBox="1"/>
-          <p:nvPr/>
-        </p:nvSpPr>
-        <p:spPr>
-          <a:xfrm>
-            <a:off x="914400" y="1371600"/>
-            <a:ext cx="10058400" cy="914400"/>
-          </a:xfrm>
-          <a:prstGeom prst="rect">
-            <a:avLst/>
-          </a:prstGeom>
-          <a:noFill/>
-        </p:spPr>
-        <p:txBody>
-          <a:bodyPr wrap="square">
-            <a:spAutoFit/>
-          </a:bodyPr>
-          <a:lstStyle/>
-          <a:p/>
-          <a:p>
-            <a:pPr>
-              <a:defRPr sz="2400"/>
-            </a:pPr>
-            <a:r>
-              <a:t>4. Extração: Durante a inferência, a árvore sintática é inspecionada para retornar a rota representacional mais parcimoniosa do grafo.</a:t>
-            </a:r>
-          </a:p>
-        </p:txBody>
-      </p:sp>
-      <p:pic>
-        <p:nvPicPr>
-          <p:cNvPr id="4" name="Picture 3" descr="egraph_step_4.png"/>
-          <p:cNvPicPr>
-            <a:picLocks noChangeAspect="1"/>
-          </p:cNvPicPr>
-          <p:nvPr/>
-        </p:nvPicPr>
-        <p:blipFill>
-          <a:blip r:embed="rId2"/>
-          <a:stretch>
-            <a:fillRect/>
-          </a:stretch>
-        </p:blipFill>
-        <p:spPr>
-          <a:xfrm>
-            <a:off x="2286000" y="2743200"/>
-            <a:ext cx="7315200" cy="2891574"/>
-          </a:xfrm>
-          <a:prstGeom prst="rect">
-            <a:avLst/>
-          </a:prstGeom>
-        </p:spPr>
-      </p:pic>
-    </p:spTree>
-  </p:cSld>
-  <p:clrMapOvr>
-    <a:masterClrMapping/>
-  </p:clrMapOvr>
-</p:sld>
-</file>
-
-<file path=ppt/slides/slide19.xml><?xml version="1.0" encoding="utf-8"?>
-<p:sld xmlns:a="http://schemas.openxmlformats.org/drawingml/2006/main" xmlns:p="http://schemas.openxmlformats.org/presentationml/2006/main" xmlns:r="http://schemas.openxmlformats.org/officeDocument/2006/relationships">
-  <p:cSld>
-    <p:spTree>
-      <p:nvGrpSpPr>
-        <p:cNvPr id="1" name=""/>
-        <p:cNvGrpSpPr/>
-        <p:nvPr/>
-      </p:nvGrpSpPr>
-      <p:grpSpPr/>
-      <p:sp>
-        <p:nvSpPr>
-          <p:cNvPr id="2" name="Title 1"/>
-          <p:cNvSpPr>
-            <a:spLocks noGrp="1"/>
-          </p:cNvSpPr>
-          <p:nvPr>
-            <p:ph type="title"/>
-          </p:nvPr>
-        </p:nvSpPr>
-        <p:spPr/>
-        <p:txBody>
-          <a:bodyPr/>
-          <a:lstStyle/>
-          <a:p>
-            <a:r>
-              <a:t>Barreiras das Ferramentas Atuais</a:t>
-            </a:r>
-          </a:p>
-        </p:txBody>
-      </p:sp>
-      <p:sp>
-        <p:nvSpPr>
-          <p:cNvPr id="3" name="Content Placeholder 2"/>
-          <p:cNvSpPr>
-            <a:spLocks noGrp="1"/>
-          </p:cNvSpPr>
-          <p:nvPr>
-            <p:ph idx="1"/>
-          </p:nvPr>
-        </p:nvSpPr>
-        <p:spPr/>
-        <p:txBody>
-          <a:bodyPr/>
-          <a:lstStyle/>
-          <a:p/>
-          <a:p>
-            <a:pPr>
-              <a:defRPr sz="2200"/>
-            </a:pPr>
-            <a:r>
-              <a:t>A maioria dos softwares atuais de SR (como TuringBot e HeuristicLab) ainda sofre com alguns problemas cruciais:</a:t>
-            </a:r>
-          </a:p>
-          <a:p>
-            <a:pPr lvl="1">
-              <a:defRPr sz="2000"/>
-            </a:pPr>
-            <a:r>
-              <a:t>Peso Local: Eles forçam que o próprio computador do usuário (com CPU e bateria normais) sustente sozinho toda a carga violenta do cálculo da evolução.</a:t>
-            </a:r>
-          </a:p>
-          <a:p>
-            <a:pPr lvl="1">
-              <a:defRPr sz="2000"/>
-            </a:pPr>
-            <a:r>
-              <a:t>Fluxo de Trabalho Quebrado: O analista depende de abrir várias ferramentas em janelas separadas para preparar os dados antes e validar a equação depois.</a:t>
-            </a:r>
-          </a:p>
-          <a:p>
-            <a:pPr lvl="1">
-              <a:defRPr sz="2000"/>
-            </a:pPr>
-            <a:r>
-              <a:t>Analista Passivo: O software geralmente só cospe a equação "final" para o usuário. Isso priva o analista de navegar livremente pelo E-graph para ver quais eram as opções em 2º ou 3º lugar.</a:t>
-            </a:r>
-          </a:p>
-        </p:txBody>
-      </p:sp>
-    </p:spTree>
-  </p:cSld>
-  <p:clrMapOvr>
-    <a:masterClrMapping/>
-  </p:clrMapOvr>
-</p:sld>
-</file>
-
-<file path=ppt/slides/slide2.xml><?xml version="1.0" encoding="utf-8"?>
-<p:sld xmlns:a="http://schemas.openxmlformats.org/drawingml/2006/main" xmlns:p="http://schemas.openxmlformats.org/presentationml/2006/main" xmlns:r="http://schemas.openxmlformats.org/officeDocument/2006/relationships">
-  <p:cSld>
-    <p:spTree>
-      <p:nvGrpSpPr>
-        <p:cNvPr id="1" name=""/>
-        <p:cNvGrpSpPr/>
-        <p:nvPr/>
-      </p:nvGrpSpPr>
-      <p:grpSpPr/>
-      <p:sp>
-        <p:nvSpPr>
-          <p:cNvPr id="2" name="Title 1"/>
-          <p:cNvSpPr>
-            <a:spLocks noGrp="1"/>
-          </p:cNvSpPr>
-          <p:nvPr>
-            <p:ph type="title"/>
-          </p:nvPr>
-        </p:nvSpPr>
-        <p:spPr/>
-        <p:txBody>
-          <a:bodyPr/>
-          <a:lstStyle/>
-          <a:p>
-            <a:r>
-              <a:t>Aplicações de Amplo Escopo na Era da IA</a:t>
-            </a:r>
-          </a:p>
-        </p:txBody>
-      </p:sp>
-      <p:sp>
-        <p:nvSpPr>
-          <p:cNvPr id="3" name="Content Placeholder 2"/>
-          <p:cNvSpPr>
-            <a:spLocks noGrp="1"/>
-          </p:cNvSpPr>
-          <p:nvPr>
-            <p:ph idx="1"/>
-          </p:nvPr>
-        </p:nvSpPr>
-        <p:spPr/>
-        <p:txBody>
-          <a:bodyPr/>
-          <a:lstStyle/>
-          <a:p/>
-          <a:p>
-            <a:pPr>
-              <a:defRPr sz="2200"/>
-            </a:pPr>
-            <a:r>
-              <a:t>Atualmente, observa-se uma dependência estrutural de modelos de Inteligência Artificial para diversas tarefas fundamentais da sociedade.</a:t>
-            </a:r>
-          </a:p>
-          <a:p>
-            <a:pPr lvl="1">
-              <a:defRPr sz="2000"/>
-            </a:pPr>
-            <a:r>
-              <a:t>Modelos de Linguagem de Larga Escala (LLMs): Ferramentas conversacionais de vasta adoção, como ChatGPT e GitHub Copilot.</a:t>
-            </a:r>
-          </a:p>
-          <a:p>
-            <a:pPr lvl="1">
-              <a:defRPr sz="2000"/>
-            </a:pPr>
-            <a:r>
-              <a:t>Predição Financeira: Modelos preditivos de alta frequência projetados para a dinâmica do mercado de ações.</a:t>
-            </a:r>
-          </a:p>
-          <a:p>
-            <a:pPr lvl="1">
-              <a:defRPr sz="2000"/>
-            </a:pPr>
-            <a:r>
-              <a:t>Saúde Pública: Predição de disseminação de doenças.</a:t>
-            </a:r>
-          </a:p>
-          <a:p>
-            <a:pPr lvl="1">
-              <a:defRPr sz="2000"/>
-            </a:pPr>
-            <a:r>
-              <a:t>Outras Aplicações: Classificação de imagens, predição de estoques, sistemas de recomendação.</a:t>
-            </a:r>
-          </a:p>
-        </p:txBody>
-      </p:sp>
-    </p:spTree>
-  </p:cSld>
-  <p:clrMapOvr>
-    <a:masterClrMapping/>
-  </p:clrMapOvr>
-</p:sld>
-</file>
-
-<file path=ppt/slides/slide20.xml><?xml version="1.0" encoding="utf-8"?>
-<p:sld xmlns:a="http://schemas.openxmlformats.org/drawingml/2006/main" xmlns:p="http://schemas.openxmlformats.org/presentationml/2006/main" xmlns:r="http://schemas.openxmlformats.org/officeDocument/2006/relationships">
-  <p:cSld>
-    <p:spTree>
-      <p:nvGrpSpPr>
-        <p:cNvPr id="1" name=""/>
-        <p:cNvGrpSpPr/>
-        <p:nvPr/>
-      </p:nvGrpSpPr>
-      <p:grpSpPr/>
-      <p:sp>
-        <p:nvSpPr>
-          <p:cNvPr id="2" name="Title 1"/>
-          <p:cNvSpPr>
-            <a:spLocks noGrp="1"/>
-          </p:cNvSpPr>
-          <p:nvPr>
-            <p:ph type="title"/>
-          </p:nvPr>
-        </p:nvSpPr>
-        <p:spPr/>
-        <p:txBody>
-          <a:bodyPr/>
-          <a:lstStyle/>
-          <a:p>
-            <a:r>
-              <a:t>A Solução: Plataforma Spectrum</a:t>
-            </a:r>
-          </a:p>
-        </p:txBody>
-      </p:sp>
-      <p:sp>
-        <p:nvSpPr>
-          <p:cNvPr id="3" name="Content Placeholder 2"/>
-          <p:cNvSpPr>
-            <a:spLocks noGrp="1"/>
-          </p:cNvSpPr>
-          <p:nvPr>
-            <p:ph idx="1"/>
-          </p:nvPr>
-        </p:nvSpPr>
-        <p:spPr/>
-        <p:txBody>
-          <a:bodyPr/>
-          <a:lstStyle/>
-          <a:p/>
-          <a:p>
-            <a:pPr lvl="1">
-              <a:defRPr sz="2000"/>
-            </a:pPr>
-            <a:r>
-              <a:t>Criamos uma ferramenta nativa Web e em Nuvem dedicada a resolver todos os problemas de usabilidade da pesquisa em Regressão Simbólica.</a:t>
-            </a:r>
-          </a:p>
-          <a:p>
-            <a:pPr lvl="1">
-              <a:defRPr sz="2000"/>
-            </a:pPr>
-            <a:r>
-              <a:t>O processamento massivo ocorre invisível na nuvem (por workers independentes), poupando a máquina do usuário final de travamentos.</a:t>
-            </a:r>
-          </a:p>
-          <a:p>
-            <a:pPr lvl="1">
-              <a:defRPr sz="2000"/>
-            </a:pPr>
-            <a:r>
-              <a:t>Centraliza 100% da operação num ambiente amigável: do momento de subir a tabela de dados até a geração do relatório visual conclusivo.</a:t>
-            </a:r>
-          </a:p>
-        </p:txBody>
-      </p:sp>
-      <p:pic>
-        <p:nvPicPr>
-          <p:cNvPr id="4" name="Picture 3" descr="profile_aberta.png"/>
-          <p:cNvPicPr>
-            <a:picLocks noChangeAspect="1"/>
-          </p:cNvPicPr>
-          <p:nvPr/>
-        </p:nvPicPr>
-        <p:blipFill>
-          <a:blip r:embed="rId2"/>
-          <a:stretch>
-            <a:fillRect/>
-          </a:stretch>
-        </p:blipFill>
-        <p:spPr>
-          <a:xfrm>
-            <a:off x="6400800" y="1828800"/>
-            <a:ext cx="4572000" cy="2244306"/>
-          </a:xfrm>
-          <a:prstGeom prst="rect">
-            <a:avLst/>
-          </a:prstGeom>
-        </p:spPr>
-      </p:pic>
-    </p:spTree>
-  </p:cSld>
-  <p:clrMapOvr>
-    <a:masterClrMapping/>
-  </p:clrMapOvr>
-</p:sld>
-</file>
-
-<file path=ppt/slides/slide21.xml><?xml version="1.0" encoding="utf-8"?>
-<p:sld xmlns:a="http://schemas.openxmlformats.org/drawingml/2006/main" xmlns:p="http://schemas.openxmlformats.org/presentationml/2006/main" xmlns:r="http://schemas.openxmlformats.org/officeDocument/2006/relationships">
-  <p:cSld>
-    <p:spTree>
-      <p:nvGrpSpPr>
-        <p:cNvPr id="1" name=""/>
-        <p:cNvGrpSpPr/>
-        <p:nvPr/>
-      </p:nvGrpSpPr>
-      <p:grpSpPr/>
-      <p:sp>
-        <p:nvSpPr>
-          <p:cNvPr id="2" name="Title 1"/>
-          <p:cNvSpPr>
-            <a:spLocks noGrp="1"/>
-          </p:cNvSpPr>
-          <p:nvPr>
-            <p:ph type="title"/>
-          </p:nvPr>
-        </p:nvSpPr>
-        <p:spPr/>
-        <p:txBody>
-          <a:bodyPr/>
-          <a:lstStyle/>
-          <a:p>
-            <a:r>
-              <a:t>Domain-Driven Design (A Arquitetura)</a:t>
-            </a:r>
-          </a:p>
-        </p:txBody>
-      </p:sp>
-      <p:sp>
-        <p:nvSpPr>
-          <p:cNvPr id="3" name="Content Placeholder 2"/>
-          <p:cNvSpPr>
-            <a:spLocks noGrp="1"/>
-          </p:cNvSpPr>
-          <p:nvPr>
-            <p:ph idx="1"/>
-          </p:nvPr>
-        </p:nvSpPr>
-        <p:spPr/>
-        <p:txBody>
-          <a:bodyPr/>
-          <a:lstStyle/>
-          <a:p/>
-          <a:p>
-            <a:pPr>
-              <a:defRPr sz="2200"/>
-            </a:pPr>
-            <a:r>
-              <a:t>A arquitetura do sistema segue os princípios do Domain-Driven Design (DDD), garantindo o isolamento da regra de negócio em relação à infraestrutura. Os principais domínios são:</a:t>
-            </a:r>
-          </a:p>
-          <a:p>
-            <a:pPr lvl="1">
-              <a:defRPr sz="2000"/>
-            </a:pPr>
-            <a:r>
-              <a:t>Authentication: Regras de login e segurança de credenciais para os pesquisadores logarem na plataforma.</a:t>
-            </a:r>
-          </a:p>
-          <a:p>
-            <a:pPr lvl="1">
-              <a:defRPr sz="2000"/>
-            </a:pPr>
-            <a:r>
-              <a:t>Workspace: Gestão e isolamento das pastas, tabelas de dados brutos e rascunhos individuais de cada usuário.</a:t>
-            </a:r>
-          </a:p>
-          <a:p>
-            <a:pPr lvl="1">
-              <a:defRPr sz="2000"/>
-            </a:pPr>
-            <a:r>
-              <a:t>Training: Coordena o envio das execuções de Inteligência Artificial para as filas na nuvem garantindo não travar a Web.</a:t>
-            </a:r>
-          </a:p>
-          <a:p>
-            <a:pPr lvl="1">
-              <a:defRPr sz="2000"/>
-            </a:pPr>
-            <a:r>
-              <a:t>Inference: O módulo que analisa o grafo já processado e exibe em tabelas os melhores resultados matemáticos garimpados.</a:t>
-            </a:r>
-          </a:p>
-        </p:txBody>
-      </p:sp>
-    </p:spTree>
-  </p:cSld>
-  <p:clrMapOvr>
-    <a:masterClrMapping/>
-  </p:clrMapOvr>
-</p:sld>
-</file>
-
-<file path=ppt/slides/slide22.xml><?xml version="1.0" encoding="utf-8"?>
-<p:sld xmlns:a="http://schemas.openxmlformats.org/drawingml/2006/main" xmlns:p="http://schemas.openxmlformats.org/presentationml/2006/main" xmlns:r="http://schemas.openxmlformats.org/officeDocument/2006/relationships">
-  <p:cSld>
-    <p:spTree>
-      <p:nvGrpSpPr>
-        <p:cNvPr id="1" name=""/>
-        <p:cNvGrpSpPr/>
-        <p:nvPr/>
-      </p:nvGrpSpPr>
-      <p:grpSpPr/>
-      <p:sp>
-        <p:nvSpPr>
-          <p:cNvPr id="2" name="Title 1"/>
-          <p:cNvSpPr>
-            <a:spLocks noGrp="1"/>
-          </p:cNvSpPr>
-          <p:nvPr>
-            <p:ph type="title"/>
-          </p:nvPr>
-        </p:nvSpPr>
-        <p:spPr/>
-        <p:txBody>
-          <a:bodyPr/>
-          <a:lstStyle/>
-          <a:p>
-            <a:r>
-              <a:t>Entidades Principais (1/2)</a:t>
-            </a:r>
-          </a:p>
-        </p:txBody>
-      </p:sp>
-      <p:sp>
-        <p:nvSpPr>
-          <p:cNvPr id="3" name="Content Placeholder 2"/>
-          <p:cNvSpPr>
-            <a:spLocks noGrp="1"/>
-          </p:cNvSpPr>
-          <p:nvPr>
-            <p:ph idx="1"/>
-          </p:nvPr>
-        </p:nvSpPr>
-        <p:spPr/>
-        <p:txBody>
-          <a:bodyPr/>
-          <a:lstStyle/>
-          <a:p/>
-          <a:p>
-            <a:pPr>
-              <a:defRPr sz="2200"/>
-            </a:pPr>
-            <a:r>
-              <a:t>Todo o fluxo de uso roda em cima de entidades centrais claras mapeadas dentro do banco de dados do sistema:</a:t>
-            </a:r>
-          </a:p>
-          <a:p>
-            <a:pPr lvl="1">
-              <a:defRPr sz="2000"/>
-            </a:pPr>
-            <a:r>
-              <a:t>User: A identidade central do pesquisador, responsável pela autenticação e controle de acesso aos recursos na plataforma.</a:t>
-            </a:r>
-          </a:p>
-          <a:p>
-            <a:pPr lvl="1">
-              <a:defRPr sz="2000"/>
-            </a:pPr>
-            <a:r>
-              <a:t>Dataset: Abstração lógica que armazena os metadados e as referências diretas aos arquivos físicos CSV contendo os dados experimentais para o treinamento.</a:t>
-            </a:r>
-          </a:p>
-          <a:p>
-            <a:pPr lvl="1">
-              <a:defRPr sz="2000"/>
-            </a:pPr>
-            <a:r>
-              <a:t>Profile: Espaço de trabalho personalizado no editor que organiza os datasets importados, os modelos gerados e os blocos modulares iterativos de consulta.</a:t>
-            </a:r>
-          </a:p>
-        </p:txBody>
-      </p:sp>
-    </p:spTree>
-  </p:cSld>
-  <p:clrMapOvr>
-    <a:masterClrMapping/>
-  </p:clrMapOvr>
-</p:sld>
-</file>
-
-<file path=ppt/slides/slide23.xml><?xml version="1.0" encoding="utf-8"?>
-<p:sld xmlns:a="http://schemas.openxmlformats.org/drawingml/2006/main" xmlns:p="http://schemas.openxmlformats.org/presentationml/2006/main" xmlns:r="http://schemas.openxmlformats.org/officeDocument/2006/relationships">
-  <p:cSld>
-    <p:spTree>
-      <p:nvGrpSpPr>
-        <p:cNvPr id="1" name=""/>
-        <p:cNvGrpSpPr/>
-        <p:nvPr/>
-      </p:nvGrpSpPr>
-      <p:grpSpPr/>
-      <p:sp>
-        <p:nvSpPr>
-          <p:cNvPr id="2" name="Title 1"/>
-          <p:cNvSpPr>
-            <a:spLocks noGrp="1"/>
-          </p:cNvSpPr>
-          <p:nvPr>
-            <p:ph type="title"/>
-          </p:nvPr>
-        </p:nvSpPr>
-        <p:spPr/>
-        <p:txBody>
-          <a:bodyPr/>
-          <a:lstStyle/>
-          <a:p>
-            <a:r>
-              <a:t>Entidades Principais (2/2)</a:t>
-            </a:r>
-          </a:p>
-        </p:txBody>
-      </p:sp>
-      <p:sp>
-        <p:nvSpPr>
-          <p:cNvPr id="3" name="Content Placeholder 2"/>
-          <p:cNvSpPr>
-            <a:spLocks noGrp="1"/>
-          </p:cNvSpPr>
-          <p:nvPr>
-            <p:ph idx="1"/>
-          </p:nvPr>
-        </p:nvSpPr>
-        <p:spPr/>
-        <p:txBody>
-          <a:bodyPr/>
-          <a:lstStyle/>
-          <a:p/>
-          <a:p>
-            <a:pPr>
-              <a:defRPr sz="2200"/>
-            </a:pPr>
-            <a:r>
-              <a:t>Continuação das entidades encarregadas pelo processamento lógico distribuído na nuvem:</a:t>
-            </a:r>
-          </a:p>
-          <a:p>
-            <a:pPr lvl="1">
-              <a:defRPr sz="2000"/>
-            </a:pPr>
-            <a:r>
-              <a:t>Job: Configuração que encapsula e armazena os meta-parâmetros do algoritmo genético estipulados para a execução do treinamento, despachada de forma assíncrona.</a:t>
-            </a:r>
-          </a:p>
-          <a:p>
-            <a:pPr lvl="1">
-              <a:defRPr sz="2000"/>
-            </a:pPr>
-            <a:r>
-              <a:t>Model (E-graph Dump): Abstração do modelo persistido gerado após o término de um Job. Contém referências para a visualização da Fronteira de Pareto e aos dados brutos do e-graph.</a:t>
-            </a:r>
-          </a:p>
-        </p:txBody>
-      </p:sp>
-    </p:spTree>
-  </p:cSld>
-  <p:clrMapOvr>
-    <a:masterClrMapping/>
-  </p:clrMapOvr>
-</p:sld>
-</file>
-
-<file path=ppt/slides/slide24.xml><?xml version="1.0" encoding="utf-8"?>
-<p:sld xmlns:a="http://schemas.openxmlformats.org/drawingml/2006/main" xmlns:p="http://schemas.openxmlformats.org/presentationml/2006/main" xmlns:r="http://schemas.openxmlformats.org/officeDocument/2006/relationships">
-  <p:cSld>
-    <p:spTree>
-      <p:nvGrpSpPr>
-        <p:cNvPr id="1" name=""/>
-        <p:cNvGrpSpPr/>
-        <p:nvPr/>
-      </p:nvGrpSpPr>
-      <p:grpSpPr/>
-      <p:sp>
-        <p:nvSpPr>
-          <p:cNvPr id="2" name="Title 1"/>
-          <p:cNvSpPr>
-            <a:spLocks noGrp="1"/>
-          </p:cNvSpPr>
-          <p:nvPr>
-            <p:ph type="title"/>
-          </p:nvPr>
-        </p:nvSpPr>
-        <p:spPr/>
-        <p:txBody>
-          <a:bodyPr/>
-          <a:lstStyle/>
-          <a:p>
-            <a:r>
-              <a:t>A Linguagem IQL (Inference Query Language)</a:t>
-            </a:r>
-          </a:p>
-        </p:txBody>
-      </p:sp>
-      <p:sp>
-        <p:nvSpPr>
-          <p:cNvPr id="3" name="Content Placeholder 2"/>
-          <p:cNvSpPr>
-            <a:spLocks noGrp="1"/>
-          </p:cNvSpPr>
-          <p:nvPr>
-            <p:ph idx="1"/>
-          </p:nvPr>
-        </p:nvSpPr>
-        <p:spPr/>
-        <p:txBody>
-          <a:bodyPr/>
-          <a:lstStyle/>
-          <a:p/>
-          <a:p>
-            <a:pPr>
-              <a:defRPr sz="2200"/>
-            </a:pPr>
-            <a:r>
-              <a:t>A Inference Query Language (IQL) é uma linguagem de domínio declarativa desenvolvida especificamente para a prospecção ativa de resultados.</a:t>
-            </a:r>
-          </a:p>
-          <a:p>
-            <a:pPr>
-              <a:defRPr sz="2200"/>
-            </a:pPr>
-            <a:r>
-              <a:t>Com sintaxe estrutural análoga à linguagem SQL, a IQL foi proposta para realizar buscas e filtragens condicionais sobre os e-graphs gerados durante o treinamento.</a:t>
-            </a:r>
-          </a:p>
-          <a:p>
-            <a:pPr lvl="1">
-              <a:defRPr sz="2000"/>
-            </a:pPr>
-            <a:r>
-              <a:t>Possibilita consultas diretas baseadas no limite de erro numérico e tamanho final das árvores.</a:t>
-            </a:r>
-          </a:p>
-          <a:p>
-            <a:pPr lvl="1">
-              <a:defRPr sz="2000"/>
-            </a:pPr>
-            <a:r>
-              <a:t>Atua em conjunto à biblioteca rEGGression para casamentos de padrões simbólicos em milhares de nós do e-graph.</a:t>
-            </a:r>
-          </a:p>
-          <a:p>
-            <a:pPr lvl="1">
-              <a:defRPr sz="2000"/>
-            </a:pPr>
-            <a:r>
-              <a:t>Permite extrair a expressão ótima adequada sem depender da resposta isolada arbitrária de uma ferramenta fechada.</a:t>
-            </a:r>
-          </a:p>
-        </p:txBody>
-      </p:sp>
-    </p:spTree>
-  </p:cSld>
-  <p:clrMapOvr>
-    <a:masterClrMapping/>
-  </p:clrMapOvr>
-</p:sld>
-</file>
-
-<file path=ppt/slides/slide25.xml><?xml version="1.0" encoding="utf-8"?>
-<p:sld xmlns:a="http://schemas.openxmlformats.org/drawingml/2006/main" xmlns:p="http://schemas.openxmlformats.org/presentationml/2006/main" xmlns:r="http://schemas.openxmlformats.org/officeDocument/2006/relationships">
-  <p:cSld>
-    <p:spTree>
-      <p:nvGrpSpPr>
-        <p:cNvPr id="1" name=""/>
-        <p:cNvGrpSpPr/>
-        <p:nvPr/>
-      </p:nvGrpSpPr>
-      <p:grpSpPr/>
-      <p:sp>
-        <p:nvSpPr>
-          <p:cNvPr id="2" name="Title 1"/>
-          <p:cNvSpPr>
-            <a:spLocks noGrp="1"/>
-          </p:cNvSpPr>
-          <p:nvPr>
-            <p:ph type="title"/>
-          </p:nvPr>
-        </p:nvSpPr>
-        <p:spPr/>
-        <p:txBody>
-          <a:bodyPr/>
-          <a:lstStyle/>
-          <a:p>
-            <a:r>
-              <a:t>A Sintaxe da Exploração Ativa</a:t>
-            </a:r>
-          </a:p>
-        </p:txBody>
-      </p:sp>
-      <p:sp>
-        <p:nvSpPr>
-          <p:cNvPr id="3" name="Content Placeholder 2"/>
-          <p:cNvSpPr>
-            <a:spLocks noGrp="1"/>
-          </p:cNvSpPr>
-          <p:nvPr>
-            <p:ph idx="1"/>
-          </p:nvPr>
-        </p:nvSpPr>
-        <p:spPr/>
-        <p:txBody>
-          <a:bodyPr/>
-          <a:lstStyle/>
-          <a:p/>
-          <a:p>
-            <a:pPr>
-              <a:defRPr sz="2200"/>
-            </a:pPr>
-            <a:r>
-              <a:t>A IQL permite que o pesquisador crie regras de filtragem para formular buscas estruturadas e detalhadas:</a:t>
-            </a:r>
-          </a:p>
-          <a:p>
-            <a:pPr>
-              <a:defRPr sz="2200"/>
-            </a:pPr>
-            <a:r>
-              <a:t>SELECT TOP 5 expression, fitness, size FROM egraph_gravitacional WHERE size &lt;= 15 AND fitness &lt; 0.05 PATTERN IS LIKE sin(v0) * v1;</a:t>
-            </a:r>
-          </a:p>
-          <a:p>
-            <a:pPr lvl="1">
-              <a:defRPr sz="2000"/>
-            </a:pPr>
-            <a:r>
-              <a:t>Filtragem Estrutural (Pattern): A diretiva `PATTERN` permite a extração condicional de expressões matemáticas limitando-as rigorosamente pela correspondência de sua morfologia sintática.</a:t>
-            </a:r>
-          </a:p>
-          <a:p>
-            <a:pPr lvl="1">
-              <a:defRPr sz="2000"/>
-            </a:pPr>
-            <a:r>
-              <a:t>Avaliação Contínua: A interface estabelece comunicações assíncronas do tipo Server Side Events (SSE) para renderizar a extração parcial das equações no navegador conforme o servidor as obtém.</a:t>
-            </a:r>
-          </a:p>
-        </p:txBody>
-      </p:sp>
-    </p:spTree>
-  </p:cSld>
-  <p:clrMapOvr>
-    <a:masterClrMapping/>
-  </p:clrMapOvr>
-</p:sld>
-</file>
-
-<file path=ppt/slides/slide26.xml><?xml version="1.0" encoding="utf-8"?>
-<p:sld xmlns:a="http://schemas.openxmlformats.org/drawingml/2006/main" xmlns:p="http://schemas.openxmlformats.org/presentationml/2006/main" xmlns:r="http://schemas.openxmlformats.org/officeDocument/2006/relationships">
-  <p:cSld>
-    <p:spTree>
-      <p:nvGrpSpPr>
-        <p:cNvPr id="1" name=""/>
-        <p:cNvGrpSpPr/>
-        <p:nvPr/>
-      </p:nvGrpSpPr>
-      <p:grpSpPr/>
-      <p:sp>
-        <p:nvSpPr>
-          <p:cNvPr id="2" name="Title 1"/>
-          <p:cNvSpPr>
-            <a:spLocks noGrp="1"/>
-          </p:cNvSpPr>
-          <p:nvPr>
-            <p:ph type="title"/>
-          </p:nvPr>
-        </p:nvSpPr>
-        <p:spPr/>
-        <p:txBody>
-          <a:bodyPr/>
-          <a:lstStyle/>
-          <a:p>
-            <a:r>
-              <a:t>Interface de Perfis e Blocos Modulares</a:t>
-            </a:r>
-          </a:p>
-        </p:txBody>
-      </p:sp>
-      <p:sp>
-        <p:nvSpPr>
-          <p:cNvPr id="3" name="Content Placeholder 2"/>
-          <p:cNvSpPr>
-            <a:spLocks noGrp="1"/>
-          </p:cNvSpPr>
-          <p:nvPr>
-            <p:ph idx="1"/>
-          </p:nvPr>
-        </p:nvSpPr>
-        <p:spPr/>
-        <p:txBody>
-          <a:bodyPr/>
-          <a:lstStyle/>
-          <a:p/>
-          <a:p>
-            <a:pPr lvl="1">
-              <a:defRPr sz="2000"/>
-            </a:pPr>
-            <a:r>
-              <a:t>O ambiente de trabalho unifica a extração analítica através da organização da visualização em blocos modulares.</a:t>
-            </a:r>
-          </a:p>
-          <a:p>
-            <a:pPr lvl="1">
-              <a:defRPr sz="2000"/>
-            </a:pPr>
-            <a:r>
-              <a:t>Blocos IQL: Componentes executáveis que acolhem as consultas IQL estruturadas pelo pesquisador, exibindo de forma interativa a listagem de representações extraídas (via SSE).</a:t>
-            </a:r>
-          </a:p>
-          <a:p>
-            <a:pPr lvl="1">
-              <a:defRPr sz="2000"/>
-            </a:pPr>
-            <a:r>
-              <a:t>Blocos Markdown: Área textual baseada na linguagem de marcação Markdown (amplamente adotada em cadernos acadêmicos), utilizada para formatar redações e relatar a justificativa científica das expressões obtidas.</a:t>
-            </a:r>
-          </a:p>
-        </p:txBody>
-      </p:sp>
-      <p:pic>
-        <p:nvPicPr>
-          <p:cNvPr id="4" name="Picture 3" descr="inference_block_results.png"/>
-          <p:cNvPicPr>
-            <a:picLocks noChangeAspect="1"/>
-          </p:cNvPicPr>
-          <p:nvPr/>
-        </p:nvPicPr>
-        <p:blipFill>
-          <a:blip r:embed="rId2"/>
-          <a:stretch>
-            <a:fillRect/>
-          </a:stretch>
-        </p:blipFill>
-        <p:spPr>
-          <a:xfrm>
-            <a:off x="6400800" y="1828800"/>
-            <a:ext cx="4572000" cy="2537901"/>
-          </a:xfrm>
-          <a:prstGeom prst="rect">
-            <a:avLst/>
-          </a:prstGeom>
-        </p:spPr>
-      </p:pic>
-    </p:spTree>
-  </p:cSld>
-  <p:clrMapOvr>
-    <a:masterClrMapping/>
-  </p:clrMapOvr>
-</p:sld>
-</file>
-
-<file path=ppt/slides/slide27.xml><?xml version="1.0" encoding="utf-8"?>
-<p:sld xmlns:a="http://schemas.openxmlformats.org/drawingml/2006/main" xmlns:p="http://schemas.openxmlformats.org/presentationml/2006/main" xmlns:r="http://schemas.openxmlformats.org/officeDocument/2006/relationships">
-  <p:cSld>
-    <p:spTree>
-      <p:nvGrpSpPr>
-        <p:cNvPr id="1" name=""/>
-        <p:cNvGrpSpPr/>
-        <p:nvPr/>
-      </p:nvGrpSpPr>
-      <p:grpSpPr/>
-      <p:sp>
-        <p:nvSpPr>
-          <p:cNvPr id="2" name="Title 1"/>
-          <p:cNvSpPr>
-            <a:spLocks noGrp="1"/>
-          </p:cNvSpPr>
-          <p:nvPr>
-            <p:ph type="title"/>
-          </p:nvPr>
-        </p:nvSpPr>
-        <p:spPr/>
-        <p:txBody>
-          <a:bodyPr/>
-          <a:lstStyle/>
-          <a:p>
-            <a:r>
-              <a:t>Funcionalidades: Gestão de Datasets</a:t>
-            </a:r>
-          </a:p>
-        </p:txBody>
-      </p:sp>
-      <p:sp>
-        <p:nvSpPr>
-          <p:cNvPr id="3" name="Content Placeholder 2"/>
-          <p:cNvSpPr>
-            <a:spLocks noGrp="1"/>
-          </p:cNvSpPr>
-          <p:nvPr>
-            <p:ph idx="1"/>
-          </p:nvPr>
-        </p:nvSpPr>
-        <p:spPr/>
-        <p:txBody>
-          <a:bodyPr/>
-          <a:lstStyle/>
-          <a:p/>
-          <a:p>
-            <a:pPr lvl="1">
-              <a:defRPr sz="2000"/>
-            </a:pPr>
-            <a:r>
-              <a:t>Espaços de Trabalho Limpos: Todo projeto novo começa num Workspace segregado, mantendo a tela organizada.</a:t>
-            </a:r>
-          </a:p>
-          <a:p>
-            <a:pPr lvl="1">
-              <a:defRPr sz="2000"/>
-            </a:pPr>
-            <a:r>
-              <a:t>Pipeline de Dados Integrado: A abstração permite conduzir o envio dos dados, a verificação morfológica e a inicialização de Jobs preditivos concentrados em uma única aplicação web.</a:t>
-            </a:r>
-          </a:p>
-          <a:p>
-            <a:pPr lvl="1">
-              <a:defRPr sz="2000"/>
-            </a:pPr>
-            <a:r>
-              <a:t>Garantia Pré-Treino: O sistema abre uma visão da tabela final carregada, deixando o pesquisador conferir visualmente se os dados batem antes de desperdiçar processamento genético rodando.</a:t>
-            </a:r>
-          </a:p>
-        </p:txBody>
-      </p:sp>
-      <p:pic>
-        <p:nvPicPr>
-          <p:cNvPr id="4" name="Picture 3" descr="upload_data_preview.png"/>
-          <p:cNvPicPr>
-            <a:picLocks noChangeAspect="1"/>
-          </p:cNvPicPr>
-          <p:nvPr/>
-        </p:nvPicPr>
-        <p:blipFill>
-          <a:blip r:embed="rId2"/>
-          <a:stretch>
-            <a:fillRect/>
-          </a:stretch>
-        </p:blipFill>
-        <p:spPr>
-          <a:xfrm>
-            <a:off x="6400800" y="1828800"/>
-            <a:ext cx="4572000" cy="2700338"/>
-          </a:xfrm>
-          <a:prstGeom prst="rect">
-            <a:avLst/>
-          </a:prstGeom>
-        </p:spPr>
-      </p:pic>
-    </p:spTree>
-  </p:cSld>
-  <p:clrMapOvr>
-    <a:masterClrMapping/>
-  </p:clrMapOvr>
-</p:sld>
-</file>
-
-<file path=ppt/slides/slide28.xml><?xml version="1.0" encoding="utf-8"?>
-<p:sld xmlns:a="http://schemas.openxmlformats.org/drawingml/2006/main" xmlns:p="http://schemas.openxmlformats.org/presentationml/2006/main" xmlns:r="http://schemas.openxmlformats.org/officeDocument/2006/relationships">
-  <p:cSld>
-    <p:spTree>
-      <p:nvGrpSpPr>
-        <p:cNvPr id="1" name=""/>
-        <p:cNvGrpSpPr/>
-        <p:nvPr/>
-      </p:nvGrpSpPr>
-      <p:grpSpPr/>
-      <p:sp>
-        <p:nvSpPr>
-          <p:cNvPr id="2" name="Title 1"/>
-          <p:cNvSpPr>
-            <a:spLocks noGrp="1"/>
-          </p:cNvSpPr>
-          <p:nvPr>
-            <p:ph type="title"/>
-          </p:nvPr>
-        </p:nvSpPr>
-        <p:spPr/>
-        <p:txBody>
-          <a:bodyPr/>
-          <a:lstStyle/>
-          <a:p>
-            <a:r>
-              <a:t>Funcionalidades: Submissão de Jobs</a:t>
-            </a:r>
-          </a:p>
-        </p:txBody>
-      </p:sp>
-      <p:sp>
-        <p:nvSpPr>
-          <p:cNvPr id="3" name="Content Placeholder 2"/>
-          <p:cNvSpPr>
-            <a:spLocks noGrp="1"/>
-          </p:cNvSpPr>
-          <p:nvPr>
-            <p:ph idx="1"/>
-          </p:nvPr>
-        </p:nvSpPr>
-        <p:spPr/>
-        <p:txBody>
-          <a:bodyPr/>
-          <a:lstStyle/>
-          <a:p/>
-          <a:p>
-            <a:pPr>
-              <a:defRPr sz="2200"/>
-            </a:pPr>
-            <a:r>
-              <a:t>A criação de modelos de regressão é plenamente configurável por meio da interface gráfica da plataforma.</a:t>
-            </a:r>
-          </a:p>
-          <a:p>
-            <a:pPr lvl="1">
-              <a:defRPr sz="2000"/>
-            </a:pPr>
-            <a:r>
-              <a:t>Configuração de Parâmetros: Área dedicada à definição minuciosa das variáveis estipuladas ao treinamento (Tamanho da População, Taxa de Mutação e Limites de Épocas).</a:t>
-            </a:r>
-          </a:p>
-          <a:p>
-            <a:pPr lvl="1">
-              <a:defRPr sz="2000"/>
-            </a:pPr>
-            <a:r>
-              <a:t>Execução Distribuída: A carga computacional gerada pelo Job é despachada por meio de um broker de filas (RabbitMQ), garantindo execução assíncrona e isolada em instâncias remotas de Workers, liberando a interface.</a:t>
-            </a:r>
-          </a:p>
-        </p:txBody>
-      </p:sp>
-      <p:pic>
-        <p:nvPicPr>
-          <p:cNvPr id="4" name="Picture 3" descr="add_job_section.png"/>
-          <p:cNvPicPr>
-            <a:picLocks noChangeAspect="1"/>
-          </p:cNvPicPr>
-          <p:nvPr/>
-        </p:nvPicPr>
-        <p:blipFill>
-          <a:blip r:embed="rId2"/>
-          <a:stretch>
-            <a:fillRect/>
-          </a:stretch>
-        </p:blipFill>
-        <p:spPr>
-          <a:xfrm>
-            <a:off x="6400800" y="1828800"/>
-            <a:ext cx="4572000" cy="2765701"/>
-          </a:xfrm>
-          <a:prstGeom prst="rect">
-            <a:avLst/>
-          </a:prstGeom>
-        </p:spPr>
-      </p:pic>
-    </p:spTree>
-  </p:cSld>
-  <p:clrMapOvr>
-    <a:masterClrMapping/>
-  </p:clrMapOvr>
-</p:sld>
-</file>
-
-<file path=ppt/slides/slide29.xml><?xml version="1.0" encoding="utf-8"?>
-<p:sld xmlns:a="http://schemas.openxmlformats.org/drawingml/2006/main" xmlns:p="http://schemas.openxmlformats.org/presentationml/2006/main" xmlns:r="http://schemas.openxmlformats.org/officeDocument/2006/relationships">
-  <p:cSld>
-    <p:spTree>
-      <p:nvGrpSpPr>
-        <p:cNvPr id="1" name=""/>
-        <p:cNvGrpSpPr/>
-        <p:nvPr/>
-      </p:nvGrpSpPr>
-      <p:grpSpPr/>
-      <p:sp>
-        <p:nvSpPr>
-          <p:cNvPr id="2" name="Title 1"/>
-          <p:cNvSpPr>
-            <a:spLocks noGrp="1"/>
-          </p:cNvSpPr>
-          <p:nvPr>
-            <p:ph type="title"/>
-          </p:nvPr>
-        </p:nvSpPr>
-        <p:spPr/>
-        <p:txBody>
-          <a:bodyPr/>
-          <a:lstStyle/>
-          <a:p>
-            <a:r>
-              <a:t>Funcionalidades: Avaliação Multiobjetivo</a:t>
-            </a:r>
-          </a:p>
-        </p:txBody>
-      </p:sp>
-      <p:sp>
-        <p:nvSpPr>
-          <p:cNvPr id="3" name="Content Placeholder 2"/>
-          <p:cNvSpPr>
-            <a:spLocks noGrp="1"/>
-          </p:cNvSpPr>
-          <p:nvPr>
-            <p:ph idx="1"/>
-          </p:nvPr>
-        </p:nvSpPr>
-        <p:spPr/>
-        <p:txBody>
-          <a:bodyPr/>
-          <a:lstStyle/>
-          <a:p/>
-          <a:p>
-            <a:pPr>
-              <a:defRPr sz="2200"/>
-            </a:pPr>
-            <a:r>
-              <a:t>A Avaliação Multiobjetivo auxilia a seleção do modelo, viabilizando o balanço adequado de métricas conflitantes.</a:t>
-            </a:r>
-          </a:p>
-          <a:p>
-            <a:pPr lvl="1">
-              <a:defRPr sz="2000"/>
-            </a:pPr>
-            <a:r>
-              <a:t>Fronteira de Pareto: O módulo plota um gráfico em duas dimensões explicitando as equações com base nos pilares da regressão simbólica: a Precisão de Acerto vs a Complexidade Morfológica (Tamanho da Árvore).</a:t>
-            </a:r>
-          </a:p>
-          <a:p>
-            <a:pPr lvl="1">
-              <a:defRPr sz="2000"/>
-            </a:pPr>
-            <a:r>
-              <a:t>Seleção Intuitiva: Permite ao usuário interagir visualmente com a distribuição populacional, facilitando a escolha da expressão que apresente a melhor relação de confiabilidade sem prejuízos na interpretabilidade.</a:t>
-            </a:r>
-          </a:p>
-        </p:txBody>
-      </p:sp>
-      <p:pic>
-        <p:nvPicPr>
-          <p:cNvPr id="4" name="Picture 3" descr="model_metrics_pareto.png"/>
-          <p:cNvPicPr>
-            <a:picLocks noChangeAspect="1"/>
-          </p:cNvPicPr>
-          <p:nvPr/>
-        </p:nvPicPr>
-        <p:blipFill>
-          <a:blip r:embed="rId2"/>
-          <a:stretch>
-            <a:fillRect/>
-          </a:stretch>
-        </p:blipFill>
-        <p:spPr>
-          <a:xfrm>
-            <a:off x="6400800" y="1828800"/>
-            <a:ext cx="4572000" cy="3176089"/>
-          </a:xfrm>
-          <a:prstGeom prst="rect">
-            <a:avLst/>
-          </a:prstGeom>
-        </p:spPr>
-      </p:pic>
-    </p:spTree>
-  </p:cSld>
-  <p:clrMapOvr>
-    <a:masterClrMapping/>
-  </p:clrMapOvr>
-</p:sld>
-</file>
-
-<file path=ppt/slides/slide3.xml><?xml version="1.0" encoding="utf-8"?>
-<p:sld xmlns:a="http://schemas.openxmlformats.org/drawingml/2006/main" xmlns:p="http://schemas.openxmlformats.org/presentationml/2006/main" xmlns:r="http://schemas.openxmlformats.org/officeDocument/2006/relationships">
-  <p:cSld>
-    <p:spTree>
-      <p:nvGrpSpPr>
-        <p:cNvPr id="1" name=""/>
-        <p:cNvGrpSpPr/>
-        <p:nvPr/>
-      </p:nvGrpSpPr>
-      <p:grpSpPr/>
-      <p:sp>
-        <p:nvSpPr>
-          <p:cNvPr id="2" name="Title 1"/>
-          <p:cNvSpPr>
-            <a:spLocks noGrp="1"/>
-          </p:cNvSpPr>
-          <p:nvPr>
-            <p:ph type="title"/>
-          </p:nvPr>
-        </p:nvSpPr>
-        <p:spPr/>
-        <p:txBody>
-          <a:bodyPr/>
-          <a:lstStyle/>
-          <a:p>
-            <a:r>
-              <a:t>Algoritmos Base</a:t>
-            </a:r>
-          </a:p>
-        </p:txBody>
-      </p:sp>
-      <p:sp>
-        <p:nvSpPr>
-          <p:cNvPr id="3" name="Content Placeholder 2"/>
-          <p:cNvSpPr>
-            <a:spLocks noGrp="1"/>
-          </p:cNvSpPr>
-          <p:nvPr>
-            <p:ph idx="1"/>
-          </p:nvPr>
-        </p:nvSpPr>
-        <p:spPr/>
-        <p:txBody>
-          <a:bodyPr/>
-          <a:lstStyle/>
-          <a:p/>
-          <a:p>
-            <a:pPr>
-              <a:defRPr sz="2200"/>
-            </a:pPr>
-            <a:r>
-              <a:t>Por trás dessas aplicações complexas, operam algoritmos e modelos matemáticos bastante consolidados.</a:t>
-            </a:r>
-          </a:p>
-          <a:p>
-            <a:pPr lvl="1">
-              <a:defRPr sz="2000"/>
-            </a:pPr>
-            <a:r>
-              <a:t>Redes Neurais Artificiais Profundas</a:t>
-            </a:r>
-          </a:p>
-          <a:p>
-            <a:pPr lvl="1">
-              <a:defRPr sz="2000"/>
-            </a:pPr>
-            <a:r>
-              <a:t>Arquiteturas Transformers (Mecanismos de Atenção)</a:t>
-            </a:r>
-          </a:p>
-          <a:p>
-            <a:pPr>
-              <a:defRPr sz="2200"/>
-            </a:pPr>
-            <a:r>
-              <a:t>O desenvolvimento contemporâneo desses modelos busca maximizar a capacidade preditiva, processando grandes volumes de dados para extrair respostas numéricas cada vez mais precisas.</a:t>
-            </a:r>
-          </a:p>
-        </p:txBody>
-      </p:sp>
-    </p:spTree>
-  </p:cSld>
-  <p:clrMapOvr>
-    <a:masterClrMapping/>
-  </p:clrMapOvr>
-</p:sld>
-</file>
-
-<file path=ppt/slides/slide30.xml><?xml version="1.0" encoding="utf-8"?>
-<p:sld xmlns:a="http://schemas.openxmlformats.org/drawingml/2006/main" xmlns:p="http://schemas.openxmlformats.org/presentationml/2006/main" xmlns:r="http://schemas.openxmlformats.org/officeDocument/2006/relationships">
-  <p:cSld>
-    <p:spTree>
-      <p:nvGrpSpPr>
-        <p:cNvPr id="1" name=""/>
-        <p:cNvGrpSpPr/>
-        <p:nvPr/>
-      </p:nvGrpSpPr>
-      <p:grpSpPr/>
-      <p:sp>
-        <p:nvSpPr>
-          <p:cNvPr id="2" name="Title 1"/>
-          <p:cNvSpPr>
-            <a:spLocks noGrp="1"/>
-          </p:cNvSpPr>
-          <p:nvPr>
-            <p:ph type="title"/>
-          </p:nvPr>
-        </p:nvSpPr>
-        <p:spPr/>
-        <p:txBody>
-          <a:bodyPr/>
-          <a:lstStyle/>
-          <a:p>
-            <a:r>
-              <a:t>Comparação Analítica de Plataformas</a:t>
-            </a:r>
-          </a:p>
-        </p:txBody>
-      </p:sp>
-      <p:sp>
-        <p:nvSpPr>
-          <p:cNvPr id="3" name="Content Placeholder 2"/>
-          <p:cNvSpPr>
-            <a:spLocks noGrp="1"/>
-          </p:cNvSpPr>
-          <p:nvPr>
-            <p:ph idx="1"/>
-          </p:nvPr>
-        </p:nvSpPr>
-        <p:spPr/>
-        <p:txBody>
-          <a:bodyPr/>
-          <a:lstStyle/>
-          <a:p/>
-          <a:p>
-            <a:pPr>
-              <a:defRPr sz="2200"/>
-            </a:pPr>
-            <a:r>
-              <a:t>Comparação de funcionalidades essenciais para pesquisa em Regressão Simbólica.</a:t>
-            </a:r>
-          </a:p>
-        </p:txBody>
-      </p:sp>
-    </p:spTree>
-  </p:cSld>
-  <p:clrMapOvr>
-    <a:masterClrMapping/>
-  </p:clrMapOvr>
-</p:sld>
-</file>
-
-<file path=ppt/slides/slide31.xml><?xml version="1.0" encoding="utf-8"?>
-<p:sld xmlns:a="http://schemas.openxmlformats.org/drawingml/2006/main" xmlns:p="http://schemas.openxmlformats.org/presentationml/2006/main" xmlns:r="http://schemas.openxmlformats.org/officeDocument/2006/relationships">
-  <p:cSld>
-    <p:spTree>
-      <p:nvGrpSpPr>
-        <p:cNvPr id="1" name=""/>
-        <p:cNvGrpSpPr/>
-        <p:nvPr/>
-      </p:nvGrpSpPr>
-      <p:grpSpPr/>
-      <p:sp>
-        <p:nvSpPr>
-          <p:cNvPr id="2" name="Title 1"/>
-          <p:cNvSpPr>
-            <a:spLocks noGrp="1"/>
-          </p:cNvSpPr>
-          <p:nvPr>
-            <p:ph type="title"/>
-          </p:nvPr>
-        </p:nvSpPr>
-        <p:spPr/>
-        <p:txBody>
-          <a:bodyPr/>
-          <a:lstStyle/>
-          <a:p>
-            <a:r>
-              <a:t>Conclusão</a:t>
-            </a:r>
-          </a:p>
-        </p:txBody>
-      </p:sp>
-      <p:sp>
-        <p:nvSpPr>
-          <p:cNvPr id="3" name="Content Placeholder 2"/>
-          <p:cNvSpPr>
-            <a:spLocks noGrp="1"/>
-          </p:cNvSpPr>
-          <p:nvPr>
-            <p:ph idx="1"/>
-          </p:nvPr>
-        </p:nvSpPr>
-        <p:spPr/>
-        <p:txBody>
-          <a:bodyPr/>
-          <a:lstStyle/>
-          <a:p/>
-          <a:p>
-            <a:pPr lvl="1">
-              <a:defRPr sz="2000"/>
-            </a:pPr>
-            <a:r>
-              <a:t>A arquitetura distribuída do Spectrum provou que a transição de cargas pesadas para uma execução via filas (computação assíncrona) destrava o treinamento exaustivo sem consumir o maquinário local do analista.</a:t>
-            </a:r>
-          </a:p>
-          <a:p>
-            <a:pPr lvl="1">
-              <a:defRPr sz="2000"/>
-            </a:pPr>
-            <a:r>
-              <a:t>A linguagem estruturada IQL quebra o modelo de observação estática de outras ferramentas, permitindo ao cientista a prospecção e extração guiada de regras específicas imersas nos e-graphs.</a:t>
-            </a:r>
-          </a:p>
-          <a:p>
-            <a:pPr lvl="1">
-              <a:defRPr sz="2000"/>
-            </a:pPr>
-            <a:r>
-              <a:t>Centralizar as visualizações otimizadas (Avaliação de Pareto) acopladas ao redator acadêmico agilizou com eficiência os fluxos metodológicos demandados por pesquisadores dessa área.</a:t>
-            </a:r>
-          </a:p>
-        </p:txBody>
-      </p:sp>
-    </p:spTree>
-  </p:cSld>
-  <p:clrMapOvr>
-    <a:masterClrMapping/>
-  </p:clrMapOvr>
-</p:sld>
-</file>
-
-<file path=ppt/slides/slide32.xml><?xml version="1.0" encoding="utf-8"?>
-<p:sld xmlns:a="http://schemas.openxmlformats.org/drawingml/2006/main" xmlns:p="http://schemas.openxmlformats.org/presentationml/2006/main" xmlns:r="http://schemas.openxmlformats.org/officeDocument/2006/relationships">
-  <p:cSld>
-    <p:spTree>
-      <p:nvGrpSpPr>
-        <p:cNvPr id="1" name=""/>
-        <p:cNvGrpSpPr/>
-        <p:nvPr/>
-      </p:nvGrpSpPr>
-      <p:grpSpPr/>
-      <p:sp>
-        <p:nvSpPr>
-          <p:cNvPr id="2" name="Title 1"/>
-          <p:cNvSpPr>
-            <a:spLocks noGrp="1"/>
-          </p:cNvSpPr>
-          <p:nvPr>
-            <p:ph type="title"/>
-          </p:nvPr>
-        </p:nvSpPr>
-        <p:spPr/>
-        <p:txBody>
-          <a:bodyPr/>
-          <a:lstStyle/>
-          <a:p>
-            <a:r>
-              <a:t>Trabalhos Futuros</a:t>
-            </a:r>
-          </a:p>
-        </p:txBody>
-      </p:sp>
-      <p:sp>
-        <p:nvSpPr>
-          <p:cNvPr id="3" name="Content Placeholder 2"/>
-          <p:cNvSpPr>
-            <a:spLocks noGrp="1"/>
-          </p:cNvSpPr>
-          <p:nvPr>
-            <p:ph idx="1"/>
-          </p:nvPr>
-        </p:nvSpPr>
-        <p:spPr/>
-        <p:txBody>
-          <a:bodyPr/>
-          <a:lstStyle/>
-          <a:p/>
-          <a:p>
-            <a:pPr lvl="1">
-              <a:defRPr sz="2000"/>
-            </a:pPr>
-            <a:r>
-              <a:t>Resiliência de Rede: Implantar o padrão arquitetural estrito no código do backend para garantir que nenhum processo se perca mesmo diante de instabilidades pontuais dos Workers em nuvem.</a:t>
-            </a:r>
-          </a:p>
-          <a:p>
-            <a:pPr lvl="1">
-              <a:defRPr sz="2000"/>
-            </a:pPr>
-            <a:r>
-              <a:t>Suporte Estendido a Algoritmos Abertos: Possibilitar a integração opcional da camada de treinamento para interligar as execuções IQL aos motores otimizados em C++ (ex. PySR e Operon).</a:t>
-            </a:r>
-          </a:p>
-          <a:p>
-            <a:pPr lvl="1">
-              <a:defRPr sz="2000"/>
-            </a:pPr>
-            <a:r>
-              <a:t>Tipagens Textuais Avançadas: Expandir o processador de dados originais (backend) a fim de conseguir abranger e validar representações em texto, provindas da computação através de embeddings numéricos.</a:t>
-            </a:r>
-          </a:p>
-        </p:txBody>
-      </p:sp>
-    </p:spTree>
-  </p:cSld>
-  <p:clrMapOvr>
-    <a:masterClrMapping/>
-  </p:clrMapOvr>
-</p:sld>
-</file>
-
-<file path=ppt/slides/slide33.xml><?xml version="1.0" encoding="utf-8"?>
-<p:sld xmlns:a="http://schemas.openxmlformats.org/drawingml/2006/main" xmlns:p="http://schemas.openxmlformats.org/presentationml/2006/main" xmlns:r="http://schemas.openxmlformats.org/officeDocument/2006/relationships">
-  <p:cSld>
-    <p:spTree>
-      <p:nvGrpSpPr>
-        <p:cNvPr id="1" name=""/>
-        <p:cNvGrpSpPr/>
-        <p:nvPr/>
-      </p:nvGrpSpPr>
-      <p:grpSpPr/>
-      <p:sp>
-        <p:nvSpPr>
-          <p:cNvPr id="2" name="Title 1"/>
-          <p:cNvSpPr>
-            <a:spLocks noGrp="1"/>
-          </p:cNvSpPr>
-          <p:nvPr>
-            <p:ph type="title"/>
-          </p:nvPr>
-        </p:nvSpPr>
-        <p:spPr/>
-        <p:txBody>
-          <a:bodyPr/>
-          <a:lstStyle/>
-          <a:p>
-            <a:r>
-              <a:t>Glossário de Termos Essenciais</a:t>
-            </a:r>
-          </a:p>
-        </p:txBody>
-      </p:sp>
-      <p:sp>
-        <p:nvSpPr>
-          <p:cNvPr id="3" name="Content Placeholder 2"/>
-          <p:cNvSpPr>
-            <a:spLocks noGrp="1"/>
-          </p:cNvSpPr>
-          <p:nvPr>
-            <p:ph idx="1"/>
-          </p:nvPr>
-        </p:nvSpPr>
-        <p:spPr/>
-        <p:txBody>
-          <a:bodyPr/>
-          <a:lstStyle/>
-          <a:p/>
-          <a:p>
-            <a:pPr lvl="1">
-              <a:defRPr sz="2000"/>
-            </a:pPr>
-            <a:r>
-              <a:t>AST (Árvore de Sintaxe Abstrata): Estrutura em árvore que representa as operações e operardos hierárquicos de uma equação.</a:t>
-            </a:r>
-          </a:p>
-          <a:p>
-            <a:pPr lvl="1">
-              <a:defRPr sz="2000"/>
-            </a:pPr>
-            <a:r>
-              <a:t>E-graphs (Grafos de Igualdade): Estrutura complexa que compacta múltiplas representações lógicas que são matematicamente idênticas.</a:t>
-            </a:r>
-          </a:p>
-          <a:p>
-            <a:pPr lvl="1">
-              <a:defRPr sz="2000"/>
-            </a:pPr>
-            <a:r>
-              <a:t>eggp: Motor de regressão simbólica que roda otimizações genéticas atuando diretamente no E-graph.</a:t>
-            </a:r>
-          </a:p>
-          <a:p>
-            <a:pPr lvl="1">
-              <a:defRPr sz="2000"/>
-            </a:pPr>
-            <a:r>
-              <a:t>IQL (Inference Query Language): Linguagem proposta, análoga ao SQL, para consultar e filtrar equações dentro do E-graph.</a:t>
-            </a:r>
-          </a:p>
-          <a:p>
-            <a:pPr lvl="1">
-              <a:defRPr sz="2000"/>
-            </a:pPr>
-            <a:r>
-              <a:t>Fronteira de Pareto: O conjunto gráfico das melhores respostas, onde o modelo encontra o balanço ideal entre custo (tamanho) e benefício (precisão).</a:t>
-            </a:r>
-          </a:p>
-          <a:p>
-            <a:pPr lvl="1">
-              <a:defRPr sz="2000"/>
-            </a:pPr>
-            <a:r>
-              <a:t>Workers: Programas subjacentes assíncronos focados em arcar com a computação pesada enquanto o servidor web primário permanece livre.</a:t>
-            </a:r>
-          </a:p>
-        </p:txBody>
-      </p:sp>
-    </p:spTree>
-  </p:cSld>
-  <p:clrMapOvr>
-    <a:masterClrMapping/>
-  </p:clrMapOvr>
-</p:sld>
-</file>
-
-<file path=ppt/slides/slide34.xml><?xml version="1.0" encoding="utf-8"?>
-<p:sld xmlns:a="http://schemas.openxmlformats.org/drawingml/2006/main" xmlns:p="http://schemas.openxmlformats.org/presentationml/2006/main" xmlns:r="http://schemas.openxmlformats.org/officeDocument/2006/relationships">
-  <p:cSld>
-    <p:spTree>
-      <p:nvGrpSpPr>
-        <p:cNvPr id="1" name=""/>
-        <p:cNvGrpSpPr/>
-        <p:nvPr/>
-      </p:nvGrpSpPr>
-      <p:grpSpPr/>
-      <p:sp>
-        <p:nvSpPr>
-          <p:cNvPr id="2" name="Title 1"/>
-          <p:cNvSpPr>
-            <a:spLocks noGrp="1"/>
-          </p:cNvSpPr>
-          <p:nvPr>
-            <p:ph type="title"/>
-          </p:nvPr>
-        </p:nvSpPr>
-        <p:spPr/>
-        <p:txBody>
-          <a:bodyPr/>
-          <a:lstStyle/>
-          <a:p>
-            <a:r>
-              <a:t>Perguntas?</a:t>
-            </a:r>
-          </a:p>
-        </p:txBody>
-      </p:sp>
-      <p:sp>
-        <p:nvSpPr>
-          <p:cNvPr id="3" name="Content Placeholder 2"/>
-          <p:cNvSpPr>
-            <a:spLocks noGrp="1"/>
-          </p:cNvSpPr>
-          <p:nvPr>
-            <p:ph idx="1"/>
-          </p:nvPr>
-        </p:nvSpPr>
-        <p:spPr/>
-        <p:txBody>
-          <a:bodyPr/>
-          <a:lstStyle/>
-          <a:p/>
-        </p:txBody>
-      </p:sp>
-    </p:spTree>
-  </p:cSld>
-  <p:clrMapOvr>
-    <a:masterClrMapping/>
-  </p:clrMapOvr>
-</p:sld>
-</file>
-
-<file path=ppt/slides/slide4.xml><?xml version="1.0" encoding="utf-8"?>
-<p:sld xmlns:a="http://schemas.openxmlformats.org/drawingml/2006/main" xmlns:p="http://schemas.openxmlformats.org/presentationml/2006/main" xmlns:r="http://schemas.openxmlformats.org/officeDocument/2006/relationships">
-  <p:cSld>
-    <p:spTree>
-      <p:nvGrpSpPr>
-        <p:cNvPr id="1" name=""/>
-        <p:cNvGrpSpPr/>
-        <p:nvPr/>
-      </p:nvGrpSpPr>
-      <p:grpSpPr/>
-      <p:sp>
-        <p:nvSpPr>
-          <p:cNvPr id="2" name="Title 1"/>
-          <p:cNvSpPr>
-            <a:spLocks noGrp="1"/>
-          </p:cNvSpPr>
-          <p:nvPr>
-            <p:ph type="title"/>
-          </p:nvPr>
-        </p:nvSpPr>
-        <p:spPr/>
-        <p:txBody>
-          <a:bodyPr/>
-          <a:lstStyle/>
-          <a:p>
-            <a:r>
-              <a:t>O Paradigma da Caixa-Preta</a:t>
-            </a:r>
-          </a:p>
-        </p:txBody>
-      </p:sp>
-      <p:sp>
-        <p:nvSpPr>
-          <p:cNvPr id="3" name="Content Placeholder 2"/>
-          <p:cNvSpPr>
-            <a:spLocks noGrp="1"/>
-          </p:cNvSpPr>
-          <p:nvPr>
-            <p:ph idx="1"/>
-          </p:nvPr>
-        </p:nvSpPr>
-        <p:spPr/>
-        <p:txBody>
-          <a:bodyPr/>
-          <a:lstStyle/>
-          <a:p/>
-          <a:p>
-            <a:pPr>
-              <a:defRPr sz="2200"/>
-            </a:pPr>
-            <a:r>
-              <a:t>Apesar de atingirem altíssima precisão, esses modelos não são transparentes: não conseguimos visualizar como tomam suas decisões.</a:t>
-            </a:r>
-          </a:p>
-          <a:p>
-            <a:pPr lvl="1">
-              <a:defRPr sz="2000"/>
-            </a:pPr>
-            <a:r>
-              <a:t>Falta de Interpretabilidade: É extremamente difícil auditar o raciocínio interno da IA ou justificar o porquê de uma previsão (Ex: diagnóstico médico).</a:t>
-            </a:r>
-          </a:p>
-          <a:p>
-            <a:pPr lvl="1">
-              <a:defRPr sz="2000"/>
-            </a:pPr>
-            <a:r>
-              <a:t>Risco de Correlações Falsas: O modelo pode aprender atalhos ou padrões incorretos nos dados sem que possamos detectar.</a:t>
-            </a:r>
-          </a:p>
-          <a:p>
-            <a:pPr lvl="1">
-              <a:defRPr sz="2000"/>
-            </a:pPr>
-            <a:r>
-              <a:t>Barreira Científica: Na engenharia e nas ciências exatas, um modelo precisa ser compreensível e validar leis da física, e não apenas entregar "bons palpites" cegos.</a:t>
-            </a:r>
-          </a:p>
-        </p:txBody>
-      </p:sp>
-    </p:spTree>
-  </p:cSld>
-  <p:clrMapOvr>
-    <a:masterClrMapping/>
-  </p:clrMapOvr>
-</p:sld>
-</file>
-
-<file path=ppt/slides/slide5.xml><?xml version="1.0" encoding="utf-8"?>
-<p:sld xmlns:a="http://schemas.openxmlformats.org/drawingml/2006/main" xmlns:p="http://schemas.openxmlformats.org/presentationml/2006/main" xmlns:r="http://schemas.openxmlformats.org/officeDocument/2006/relationships">
-  <p:cSld>
-    <p:spTree>
-      <p:nvGrpSpPr>
-        <p:cNvPr id="1" name=""/>
-        <p:cNvGrpSpPr/>
-        <p:nvPr/>
-      </p:nvGrpSpPr>
-      <p:grpSpPr/>
-      <p:sp>
-        <p:nvSpPr>
-          <p:cNvPr id="2" name="Title 1"/>
-          <p:cNvSpPr>
-            <a:spLocks noGrp="1"/>
-          </p:cNvSpPr>
-          <p:nvPr>
-            <p:ph type="title"/>
-          </p:nvPr>
-        </p:nvSpPr>
-        <p:spPr/>
-        <p:txBody>
-          <a:bodyPr/>
-          <a:lstStyle/>
-          <a:p>
-            <a:r>
-              <a:t>A Regressão Simbólica (SR)</a:t>
-            </a:r>
-          </a:p>
-        </p:txBody>
-      </p:sp>
-      <p:sp>
-        <p:nvSpPr>
-          <p:cNvPr id="3" name="Content Placeholder 2"/>
-          <p:cNvSpPr>
-            <a:spLocks noGrp="1"/>
-          </p:cNvSpPr>
-          <p:nvPr>
-            <p:ph idx="1"/>
-          </p:nvPr>
-        </p:nvSpPr>
-        <p:spPr/>
-        <p:txBody>
-          <a:bodyPr/>
-          <a:lstStyle/>
-          <a:p/>
-          <a:p>
-            <a:pPr>
-              <a:defRPr sz="2200"/>
-            </a:pPr>
-            <a:r>
-              <a:t>A Regressão Simbólica surge na área de IA evolutiva como a solução ideal para criar Modelos Brancos (White-box Models) totalmente transparentes.</a:t>
-            </a:r>
-          </a:p>
-          <a:p>
-            <a:pPr lvl="1">
-              <a:defRPr sz="2000"/>
-            </a:pPr>
-            <a:r>
-              <a:t>Em vez de apenas cuspir um número final, a SR busca evoluir e deduzir a equação matemática explícita (f(x)) por trás dos dados.</a:t>
-            </a:r>
-          </a:p>
-          <a:p>
-            <a:pPr lvl="1">
-              <a:defRPr sz="2000"/>
-            </a:pPr>
-            <a:r>
-              <a:t>Com a fórmula exposta em texto puro, os especialistas humanos podem analisar o resultado, validar as leis do processo físico e corrigir falhas no modelo.</a:t>
-            </a:r>
-          </a:p>
-        </p:txBody>
-      </p:sp>
-    </p:spTree>
-  </p:cSld>
-  <p:clrMapOvr>
-    <a:masterClrMapping/>
-  </p:clrMapOvr>
-</p:sld>
-</file>
-
-<file path=ppt/slides/slide6.xml><?xml version="1.0" encoding="utf-8"?>
-<p:sld xmlns:a="http://schemas.openxmlformats.org/drawingml/2006/main" xmlns:p="http://schemas.openxmlformats.org/presentationml/2006/main" xmlns:r="http://schemas.openxmlformats.org/officeDocument/2006/relationships">
-  <p:cSld>
-    <p:spTree>
-      <p:nvGrpSpPr>
-        <p:cNvPr id="1" name=""/>
-        <p:cNvGrpSpPr/>
-        <p:nvPr/>
-      </p:nvGrpSpPr>
-      <p:grpSpPr/>
-      <p:sp>
-        <p:nvSpPr>
-          <p:cNvPr id="2" name="Title 1"/>
-          <p:cNvSpPr>
-            <a:spLocks noGrp="1"/>
-          </p:cNvSpPr>
-          <p:nvPr>
-            <p:ph type="title"/>
-          </p:nvPr>
-        </p:nvSpPr>
-        <p:spPr/>
-        <p:txBody>
-          <a:bodyPr/>
-          <a:lstStyle/>
-          <a:p>
-            <a:r>
-              <a:t>O Problema das Regressões Clássicas</a:t>
-            </a:r>
-          </a:p>
-        </p:txBody>
-      </p:sp>
-      <p:sp>
-        <p:nvSpPr>
-          <p:cNvPr id="3" name="Content Placeholder 2"/>
-          <p:cNvSpPr>
-            <a:spLocks noGrp="1"/>
-          </p:cNvSpPr>
-          <p:nvPr>
-            <p:ph idx="1"/>
-          </p:nvPr>
-        </p:nvSpPr>
-        <p:spPr/>
-        <p:txBody>
-          <a:bodyPr/>
-          <a:lstStyle/>
-          <a:p/>
-          <a:p>
-            <a:pPr>
-              <a:defRPr sz="2200"/>
-            </a:pPr>
-            <a:r>
-              <a:t>As regressões tradicionais (Linear, Polinomial) também entregam modelos transparentes, mas possuem limitações pesadas para a ciência de dados moderna:</a:t>
-            </a:r>
-          </a:p>
-          <a:p>
-            <a:pPr lvl="1">
-              <a:defRPr sz="2000"/>
-            </a:pPr>
-            <a:r>
-              <a:t>Imposição de Estrutura: O cientista de dados precisa "adivinhar" o esqueleto da equação antes mesmo de começar (ex: assumir \hat{y} = \beta_0 + \beta_1 x).</a:t>
-            </a:r>
-          </a:p>
-          <a:p>
-            <a:pPr lvl="1">
-              <a:defRPr sz="2000"/>
-            </a:pPr>
-            <a:r>
-              <a:t>Otimização Limitada: O algoritmo apenas procura o valor dos coeficientes (\beta) para preencher as lacunas dessa estrutura engessada.</a:t>
-            </a:r>
-          </a:p>
-          <a:p>
-            <a:pPr lvl="1">
-              <a:defRPr sz="2000"/>
-            </a:pPr>
-            <a:r>
-              <a:t>Gargalo Perante Fenômenos Complexos: Essas técnicas falham em representar dinâmicas da natureza que não seguem curvas simples ou previamente conhecidas pelo humano.</a:t>
-            </a:r>
-          </a:p>
-        </p:txBody>
-      </p:sp>
-    </p:spTree>
-  </p:cSld>
-  <p:clrMapOvr>
-    <a:masterClrMapping/>
-  </p:clrMapOvr>
-</p:sld>
-</file>
-
-<file path=ppt/slides/slide7.xml><?xml version="1.0" encoding="utf-8"?>
-<p:sld xmlns:a="http://schemas.openxmlformats.org/drawingml/2006/main" xmlns:p="http://schemas.openxmlformats.org/presentationml/2006/main" xmlns:r="http://schemas.openxmlformats.org/officeDocument/2006/relationships">
-  <p:cSld>
-    <p:spTree>
-      <p:nvGrpSpPr>
-        <p:cNvPr id="1" name=""/>
-        <p:cNvGrpSpPr/>
-        <p:nvPr/>
-      </p:nvGrpSpPr>
-      <p:grpSpPr/>
-      <p:sp>
-        <p:nvSpPr>
-          <p:cNvPr id="2" name="Title 1"/>
-          <p:cNvSpPr>
-            <a:spLocks noGrp="1"/>
-          </p:cNvSpPr>
-          <p:nvPr>
-            <p:ph type="title"/>
-          </p:nvPr>
-        </p:nvSpPr>
-        <p:spPr/>
-        <p:txBody>
-          <a:bodyPr/>
-          <a:lstStyle/>
-          <a:p>
-            <a:r>
-              <a:t>A Regressão Simbólica em Detalhes</a:t>
-            </a:r>
-          </a:p>
-        </p:txBody>
-      </p:sp>
-      <p:sp>
-        <p:nvSpPr>
-          <p:cNvPr id="3" name="Content Placeholder 2"/>
-          <p:cNvSpPr>
-            <a:spLocks noGrp="1"/>
-          </p:cNvSpPr>
-          <p:nvPr>
-            <p:ph idx="1"/>
-          </p:nvPr>
-        </p:nvSpPr>
-        <p:spPr/>
-        <p:txBody>
-          <a:bodyPr/>
-          <a:lstStyle/>
-          <a:p/>
-          <a:p>
-            <a:pPr>
-              <a:defRPr sz="2200"/>
-            </a:pPr>
-            <a:r>
-              <a:t>A Regressão Simbólica (SR) resolve esse engessamento construindo a fórmula inteira do zero.</a:t>
-            </a:r>
-          </a:p>
-          <a:p>
-            <a:pPr lvl="1">
-              <a:defRPr sz="2000"/>
-            </a:pPr>
-            <a:r>
-              <a:t>Realiza uma busca livre e simultânea pela estrutura da equação matemática e pelos seus respectivos parâmetros numéricos.</a:t>
-            </a:r>
-          </a:p>
-          <a:p>
-            <a:pPr lvl="1">
-              <a:defRPr sz="2000"/>
-            </a:pPr>
-            <a:r>
-              <a:t>Todas as equações do sistema são representadas internamente em forma de galhos, chamadas de Árvores de Sintaxe Abstrata (ASTs).</a:t>
-            </a:r>
-          </a:p>
-          <a:p>
-            <a:pPr lvl="1">
-              <a:defRPr sz="2000"/>
-            </a:pPr>
-            <a:r>
-              <a:t>Durante a procura, a IA tenta equilibrar dois objetivos concorrentes: entregar **alta precisão** (redução do erro \mathcal{L}) e manter **alta simplicidade** visual da fórmula.</a:t>
-            </a:r>
-          </a:p>
-        </p:txBody>
-      </p:sp>
-    </p:spTree>
-  </p:cSld>
-  <p:clrMapOvr>
-    <a:masterClrMapping/>
-  </p:clrMapOvr>
-</p:sld>
-</file>
-
 <file path=ppt/slides/slide8.xml><?xml version="1.0" encoding="utf-8"?>
 <p:sld xmlns:a="http://schemas.openxmlformats.org/drawingml/2006/main" xmlns:p="http://schemas.openxmlformats.org/presentationml/2006/main" xmlns:r="http://schemas.openxmlformats.org/officeDocument/2006/relationships">
   <p:cSld>
@@ -6027,67 +5758,60 @@
           <a:lstStyle/>
           <a:p>
             <a:r>
-              <a:t>O Fluxo do Algoritmo Genético - Etapa 1</a:t>
-            </a:r>
-          </a:p>
-        </p:txBody>
-      </p:sp>
-      <p:sp>
-        <p:nvSpPr>
-          <p:cNvPr id="3" name="TextBox 2"/>
-          <p:cNvSpPr txBox="1"/>
-          <p:nvPr/>
-        </p:nvSpPr>
-        <p:spPr>
-          <a:xfrm>
-            <a:off x="914400" y="1371600"/>
-            <a:ext cx="10058400" cy="914400"/>
-          </a:xfrm>
-          <a:prstGeom prst="rect">
-            <a:avLst/>
-          </a:prstGeom>
-          <a:noFill/>
-        </p:spPr>
-        <p:txBody>
-          <a:bodyPr wrap="square">
-            <a:spAutoFit/>
-          </a:bodyPr>
+              <a:t>O Preço da Interpretabilidade</a:t>
+            </a:r>
+          </a:p>
+        </p:txBody>
+      </p:sp>
+      <p:sp>
+        <p:nvSpPr>
+          <p:cNvPr id="3" name="Content Placeholder 2"/>
+          <p:cNvSpPr>
+            <a:spLocks noGrp="1"/>
+          </p:cNvSpPr>
+          <p:nvPr>
+            <p:ph idx="1"/>
+          </p:nvPr>
+        </p:nvSpPr>
+        <p:spPr/>
+        <p:txBody>
+          <a:bodyPr/>
           <a:lstStyle/>
           <a:p/>
           <a:p>
             <a:pPr>
-              <a:defRPr sz="2400"/>
-            </a:pPr>
-            <a:r>
-              <a:t>1. População Inicial: Um conjunto de indivíduos contendo árvores sintáticas (AST) é inicializado e sua aptidão de validação avaliada (ex. MSE).</a:t>
-            </a:r>
-          </a:p>
-        </p:txBody>
-      </p:sp>
-      <p:pic>
-        <p:nvPicPr>
-          <p:cNvPr id="4" name="Picture 3" descr="ga_step_1.png"/>
-          <p:cNvPicPr>
-            <a:picLocks noChangeAspect="1"/>
-          </p:cNvPicPr>
-          <p:nvPr/>
-        </p:nvPicPr>
-        <p:blipFill>
-          <a:blip r:embed="rId2"/>
-          <a:stretch>
-            <a:fillRect/>
-          </a:stretch>
-        </p:blipFill>
-        <p:spPr>
-          <a:xfrm>
-            <a:off x="2286000" y="2743200"/>
-            <a:ext cx="7315200" cy="2725947"/>
-          </a:xfrm>
-          <a:prstGeom prst="rect">
-            <a:avLst/>
-          </a:prstGeom>
-        </p:spPr>
-      </p:pic>
+              <a:defRPr sz="2200"/>
+            </a:pPr>
+            <a:r>
+              <a:t>Apesar de seus imensos benefícios, a Regressão Simbólica ainda não domina o mercado devido ao seu altíssimo custo computacional de treinamento:</a:t>
+            </a:r>
+          </a:p>
+          <a:p>
+            <a:pPr>
+              <a:defRPr sz="2200"/>
+            </a:pPr>
+            <a:r>
+              <a:t>O elevado número de expressões sintáticas geradas pelos operadores de mutação cresce de forma exponencial a cada geração evolutiva.</a:t>
+            </a:r>
+          </a:p>
+          <a:p>
+            <a:pPr>
+              <a:defRPr sz="2200"/>
+            </a:pPr>
+            <a:r>
+              <a:t>O modelo acaba processando infinitas fórmulas com aparências diferentes, mas que matematicamente dizem a mesma coisa (ex: x + x e 2 \cdot x).</a:t>
+            </a:r>
+          </a:p>
+          <a:p>
+            <a:pPr>
+              <a:defRPr sz="2200"/>
+            </a:pPr>
+            <a:r>
+              <a:t>O custo repetitivo de calcular a aptidão esgota rapidamente a viabilidade de execução em recursos computacionais limitados.</a:t>
+            </a:r>
+          </a:p>
+        </p:txBody>
+      </p:sp>
     </p:spTree>
   </p:cSld>
   <p:clrMapOvr>
@@ -6122,67 +5846,60 @@
           <a:lstStyle/>
           <a:p>
             <a:r>
-              <a:t>O Fluxo do Algoritmo Genético - Etapa 2</a:t>
-            </a:r>
-          </a:p>
-        </p:txBody>
-      </p:sp>
-      <p:sp>
-        <p:nvSpPr>
-          <p:cNvPr id="3" name="TextBox 2"/>
-          <p:cNvSpPr txBox="1"/>
-          <p:nvPr/>
-        </p:nvSpPr>
-        <p:spPr>
-          <a:xfrm>
-            <a:off x="914400" y="1371600"/>
-            <a:ext cx="10058400" cy="914400"/>
-          </a:xfrm>
-          <a:prstGeom prst="rect">
-            <a:avLst/>
-          </a:prstGeom>
-          <a:noFill/>
-        </p:spPr>
-        <p:txBody>
-          <a:bodyPr wrap="square">
-            <a:spAutoFit/>
-          </a:bodyPr>
+              <a:t>Grafos de Igualdade (E-graphs)</a:t>
+            </a:r>
+          </a:p>
+        </p:txBody>
+      </p:sp>
+      <p:sp>
+        <p:nvSpPr>
+          <p:cNvPr id="3" name="Content Placeholder 2"/>
+          <p:cNvSpPr>
+            <a:spLocks noGrp="1"/>
+          </p:cNvSpPr>
+          <p:nvPr>
+            <p:ph idx="1"/>
+          </p:nvPr>
+        </p:nvSpPr>
+        <p:spPr/>
+        <p:txBody>
+          <a:bodyPr/>
           <a:lstStyle/>
           <a:p/>
           <a:p>
             <a:pPr>
-              <a:defRPr sz="2400"/>
-            </a:pPr>
-            <a:r>
-              <a:t>2. Seleção: Os indivíduos que apresentam os melhores resultados de aptidão e menor número de nós (parcimônia) são selecionados para cruzamento.</a:t>
-            </a:r>
-          </a:p>
-        </p:txBody>
-      </p:sp>
-      <p:pic>
-        <p:nvPicPr>
-          <p:cNvPr id="4" name="Picture 3" descr="ga_step_2.png"/>
-          <p:cNvPicPr>
-            <a:picLocks noChangeAspect="1"/>
-          </p:cNvPicPr>
-          <p:nvPr/>
-        </p:nvPicPr>
-        <p:blipFill>
-          <a:blip r:embed="rId2"/>
-          <a:stretch>
-            <a:fillRect/>
-          </a:stretch>
-        </p:blipFill>
-        <p:spPr>
-          <a:xfrm>
-            <a:off x="2286000" y="2743200"/>
-            <a:ext cx="7315200" cy="2725947"/>
-          </a:xfrm>
-          <a:prstGeom prst="rect">
-            <a:avLst/>
-          </a:prstGeom>
-        </p:spPr>
-      </p:pic>
+              <a:defRPr sz="2200"/>
+            </a:pPr>
+            <a:r>
+              <a:t>Estruturas de dados matemáticas capazes de armazenar e compactar múltiplas expressões equivalentes de forma altamente eficiente.</a:t>
+            </a:r>
+          </a:p>
+          <a:p>
+            <a:pPr lvl="1">
+              <a:defRPr sz="2000"/>
+            </a:pPr>
+            <a:r>
+              <a:t>Classes de Equivalência (e-classes): Conjuntos de expressões logicamente equivalentes são agrupados em nós compartilhados (e-nodes).</a:t>
+            </a:r>
+          </a:p>
+          <a:p>
+            <a:pPr lvl="1">
+              <a:defRPr sz="2000"/>
+            </a:pPr>
+            <a:r>
+              <a:t>Saturação de Igualdade: O processo de aplicar regras de reescrita contínuas para explorar e agrupar representações matemáticas.</a:t>
+            </a:r>
+          </a:p>
+          <a:p>
+            <a:pPr>
+              <a:defRPr sz="2200"/>
+            </a:pPr>
+            <a:r>
+              <a:t>O eggp é o único algoritmo de regressão simbólica capaz de executar as operações de mutação e cruzamento genético de forma otimizada diretamente na estrutura dos grafos de igualdade, minimizando redundâncias estruturais e economizando drasticamente alocação de memória na busca.</a:t>
+            </a:r>
+          </a:p>
+        </p:txBody>
+      </p:sp>
     </p:spTree>
   </p:cSld>
   <p:clrMapOvr>

--- a/Apresentacao_Spectrum_Editavel.pptx
+++ b/Apresentacao_Spectrum_Editavel.pptx
@@ -36,6 +36,8 @@
     <p:sldId id="284" r:id="rId35"/>
     <p:sldId id="285" r:id="rId36"/>
     <p:sldId id="286" r:id="rId37"/>
+    <p:sldId id="287" r:id="rId38"/>
+    <p:sldId id="288" r:id="rId39"/>
   </p:sldIdLst>
   <p:sldSz cx="12191695" cy="6858000" type="screen4x3"/>
   <p:notesSz cx="6858000" cy="9144000"/>
@@ -4402,6 +4404,182 @@
           <a:lstStyle/>
           <a:p>
             <a:r>
+              <a:t>O Pipeline de Execução da IQL</a:t>
+            </a:r>
+          </a:p>
+        </p:txBody>
+      </p:sp>
+      <p:sp>
+        <p:nvSpPr>
+          <p:cNvPr id="3" name="Content Placeholder 2"/>
+          <p:cNvSpPr>
+            <a:spLocks noGrp="1"/>
+          </p:cNvSpPr>
+          <p:nvPr>
+            <p:ph idx="1"/>
+          </p:nvPr>
+        </p:nvSpPr>
+        <p:spPr/>
+        <p:txBody>
+          <a:bodyPr/>
+          <a:lstStyle/>
+          <a:p/>
+          <a:p>
+            <a:pPr>
+              <a:defRPr sz="2200"/>
+            </a:pPr>
+            <a:r>
+              <a:t>A execução das consultas IQL roda em um interpretador e compilador próprio (Parser) construído do zero na plataforma:</a:t>
+            </a:r>
+          </a:p>
+          <a:p>
+            <a:pPr lvl="1">
+              <a:defRPr sz="2000"/>
+            </a:pPr>
+            <a:r>
+              <a:t>Análise Léxica (Tokenização): Converte a consulta textual em tokens validando a sintaxe e a semântica de forma robusta.</a:t>
+            </a:r>
+          </a:p>
+          <a:p>
+            <a:pPr lvl="1">
+              <a:defRPr sz="2000"/>
+            </a:pPr>
+            <a:r>
+              <a:t>Análise Sintática (Pratt Parser): Transforma os tokens em uma Árvore de Sintaxe Abstrata (AST) representativa da própria consulta do usuário.</a:t>
+            </a:r>
+          </a:p>
+          <a:p>
+            <a:pPr lvl="1">
+              <a:defRPr sz="2000"/>
+            </a:pPr>
+            <a:r>
+              <a:t>Integração Nativa: O motor executa a AST compilada diretamente contra o e-graph carregado em memória, garantindo altíssimo desempenho na extração massiva.</a:t>
+            </a:r>
+          </a:p>
+        </p:txBody>
+      </p:sp>
+    </p:spTree>
+  </p:cSld>
+  <p:clrMapOvr>
+    <a:masterClrMapping/>
+  </p:clrMapOvr>
+</p:sld>
+</file>
+
+<file path=ppt/slides/slide23.xml><?xml version="1.0" encoding="utf-8"?>
+<p:sld xmlns:a="http://schemas.openxmlformats.org/drawingml/2006/main" xmlns:p="http://schemas.openxmlformats.org/presentationml/2006/main" xmlns:r="http://schemas.openxmlformats.org/officeDocument/2006/relationships">
+  <p:cSld>
+    <p:spTree>
+      <p:nvGrpSpPr>
+        <p:cNvPr id="1" name=""/>
+        <p:cNvGrpSpPr/>
+        <p:nvPr/>
+      </p:nvGrpSpPr>
+      <p:grpSpPr/>
+      <p:sp>
+        <p:nvSpPr>
+          <p:cNvPr id="2" name="Title 1"/>
+          <p:cNvSpPr>
+            <a:spLocks noGrp="1"/>
+          </p:cNvSpPr>
+          <p:nvPr>
+            <p:ph type="title"/>
+          </p:nvPr>
+        </p:nvSpPr>
+        <p:spPr/>
+        <p:txBody>
+          <a:bodyPr/>
+          <a:lstStyle/>
+          <a:p>
+            <a:r>
+              <a:t>Casamento de Padrões (Pattern Matching)</a:t>
+            </a:r>
+          </a:p>
+        </p:txBody>
+      </p:sp>
+      <p:sp>
+        <p:nvSpPr>
+          <p:cNvPr id="3" name="Content Placeholder 2"/>
+          <p:cNvSpPr>
+            <a:spLocks noGrp="1"/>
+          </p:cNvSpPr>
+          <p:nvPr>
+            <p:ph idx="1"/>
+          </p:nvPr>
+        </p:nvSpPr>
+        <p:spPr/>
+        <p:txBody>
+          <a:bodyPr/>
+          <a:lstStyle/>
+          <a:p/>
+          <a:p>
+            <a:pPr lvl="1">
+              <a:defRPr sz="2000"/>
+            </a:pPr>
+            <a:r>
+              <a:t>O verdadeiro poder da IQL reside na sua integração com algoritmos de Pattern Matching aplicados em grafos.</a:t>
+            </a:r>
+          </a:p>
+          <a:p>
+            <a:pPr lvl="1">
+              <a:defRPr sz="2000"/>
+            </a:pPr>
+            <a:r>
+              <a:t>A diretiva PATTERN IS LIKE instrui o motor a varrer o e-graph procurando equações que respeitem um esqueleto matemático específico (ex: sin(v0) * v1).</a:t>
+            </a:r>
+          </a:p>
+          <a:p>
+            <a:pPr lvl="1">
+              <a:defRPr sz="2000"/>
+            </a:pPr>
+            <a:r>
+              <a:t>Garante que as expressões extraídas façam total sentido para as regras de negócio ou físicas do especialista, injetando conhecimento humano na filtragem.</a:t>
+            </a:r>
+          </a:p>
+          <a:p>
+            <a:pPr>
+              <a:defRPr sz="2200"/>
+            </a:pPr>
+            <a:r>
+              <a:t>"A capacidade de filtrar expressões que respeitem características estruturais pré-estabelecidas torna o processo alinhado aos conhecimentos prévios do especialista de domínio."</a:t>
+            </a:r>
+          </a:p>
+        </p:txBody>
+      </p:sp>
+    </p:spTree>
+  </p:cSld>
+  <p:clrMapOvr>
+    <a:masterClrMapping/>
+  </p:clrMapOvr>
+</p:sld>
+</file>
+
+<file path=ppt/slides/slide24.xml><?xml version="1.0" encoding="utf-8"?>
+<p:sld xmlns:a="http://schemas.openxmlformats.org/drawingml/2006/main" xmlns:p="http://schemas.openxmlformats.org/presentationml/2006/main" xmlns:r="http://schemas.openxmlformats.org/officeDocument/2006/relationships">
+  <p:cSld>
+    <p:spTree>
+      <p:nvGrpSpPr>
+        <p:cNvPr id="1" name=""/>
+        <p:cNvGrpSpPr/>
+        <p:nvPr/>
+      </p:nvGrpSpPr>
+      <p:grpSpPr/>
+      <p:sp>
+        <p:nvSpPr>
+          <p:cNvPr id="2" name="Title 1"/>
+          <p:cNvSpPr>
+            <a:spLocks noGrp="1"/>
+          </p:cNvSpPr>
+          <p:nvPr>
+            <p:ph type="title"/>
+          </p:nvPr>
+        </p:nvSpPr>
+        <p:spPr/>
+        <p:txBody>
+          <a:bodyPr/>
+          <a:lstStyle/>
+          <a:p>
+            <a:r>
               <a:t>Exploração e Filtros Avançados</a:t>
             </a:r>
           </a:p>
@@ -4472,7 +4650,7 @@
 </p:sld>
 </file>
 
-<file path=ppt/slides/slide23.xml><?xml version="1.0" encoding="utf-8"?>
+<file path=ppt/slides/slide25.xml><?xml version="1.0" encoding="utf-8"?>
 <p:sld xmlns:a="http://schemas.openxmlformats.org/drawingml/2006/main" xmlns:p="http://schemas.openxmlformats.org/presentationml/2006/main" xmlns:r="http://schemas.openxmlformats.org/officeDocument/2006/relationships">
   <p:cSld>
     <p:spTree>
@@ -4576,7 +4754,7 @@
 </p:sld>
 </file>
 
-<file path=ppt/slides/slide24.xml><?xml version="1.0" encoding="utf-8"?>
+<file path=ppt/slides/slide26.xml><?xml version="1.0" encoding="utf-8"?>
 <p:sld xmlns:a="http://schemas.openxmlformats.org/drawingml/2006/main" xmlns:p="http://schemas.openxmlformats.org/presentationml/2006/main" xmlns:r="http://schemas.openxmlformats.org/officeDocument/2006/relationships">
   <p:cSld>
     <p:spTree>
@@ -4680,7 +4858,7 @@
 </p:sld>
 </file>
 
-<file path=ppt/slides/slide25.xml><?xml version="1.0" encoding="utf-8"?>
+<file path=ppt/slides/slide27.xml><?xml version="1.0" encoding="utf-8"?>
 <p:sld xmlns:a="http://schemas.openxmlformats.org/drawingml/2006/main" xmlns:p="http://schemas.openxmlformats.org/presentationml/2006/main" xmlns:r="http://schemas.openxmlformats.org/officeDocument/2006/relationships">
   <p:cSld>
     <p:spTree>
@@ -4784,7 +4962,7 @@
 </p:sld>
 </file>
 
-<file path=ppt/slides/slide26.xml><?xml version="1.0" encoding="utf-8"?>
+<file path=ppt/slides/slide28.xml><?xml version="1.0" encoding="utf-8"?>
 <p:sld xmlns:a="http://schemas.openxmlformats.org/drawingml/2006/main" xmlns:p="http://schemas.openxmlformats.org/presentationml/2006/main" xmlns:r="http://schemas.openxmlformats.org/officeDocument/2006/relationships">
   <p:cSld>
     <p:spTree>
@@ -4888,7 +5066,7 @@
 </p:sld>
 </file>
 
-<file path=ppt/slides/slide27.xml><?xml version="1.0" encoding="utf-8"?>
+<file path=ppt/slides/slide29.xml><?xml version="1.0" encoding="utf-8"?>
 <p:sld xmlns:a="http://schemas.openxmlformats.org/drawingml/2006/main" xmlns:p="http://schemas.openxmlformats.org/presentationml/2006/main" xmlns:r="http://schemas.openxmlformats.org/officeDocument/2006/relationships">
   <p:cSld>
     <p:spTree>
@@ -4984,150 +5162,6 @@
 </p:sld>
 </file>
 
-<file path=ppt/slides/slide28.xml><?xml version="1.0" encoding="utf-8"?>
-<p:sld xmlns:a="http://schemas.openxmlformats.org/drawingml/2006/main" xmlns:p="http://schemas.openxmlformats.org/presentationml/2006/main" xmlns:r="http://schemas.openxmlformats.org/officeDocument/2006/relationships">
-  <p:cSld>
-    <p:spTree>
-      <p:nvGrpSpPr>
-        <p:cNvPr id="1" name=""/>
-        <p:cNvGrpSpPr/>
-        <p:nvPr/>
-      </p:nvGrpSpPr>
-      <p:grpSpPr/>
-      <p:sp>
-        <p:nvSpPr>
-          <p:cNvPr id="2" name="Title 1"/>
-          <p:cNvSpPr>
-            <a:spLocks noGrp="1"/>
-          </p:cNvSpPr>
-          <p:nvPr>
-            <p:ph type="title"/>
-          </p:nvPr>
-        </p:nvSpPr>
-        <p:spPr/>
-        <p:txBody>
-          <a:bodyPr/>
-          <a:lstStyle/>
-          <a:p>
-            <a:r>
-              <a:t>Comparação Analítica de Plataformas</a:t>
-            </a:r>
-          </a:p>
-        </p:txBody>
-      </p:sp>
-      <p:sp>
-        <p:nvSpPr>
-          <p:cNvPr id="3" name="Content Placeholder 2"/>
-          <p:cNvSpPr>
-            <a:spLocks noGrp="1"/>
-          </p:cNvSpPr>
-          <p:nvPr>
-            <p:ph idx="1"/>
-          </p:nvPr>
-        </p:nvSpPr>
-        <p:spPr/>
-        <p:txBody>
-          <a:bodyPr/>
-          <a:lstStyle/>
-          <a:p/>
-          <a:p>
-            <a:pPr>
-              <a:defRPr sz="2200"/>
-            </a:pPr>
-            <a:r>
-              <a:t>Comparação de funcionalidades essenciais para pesquisa em Regressão Simbólica.</a:t>
-            </a:r>
-          </a:p>
-        </p:txBody>
-      </p:sp>
-    </p:spTree>
-  </p:cSld>
-  <p:clrMapOvr>
-    <a:masterClrMapping/>
-  </p:clrMapOvr>
-</p:sld>
-</file>
-
-<file path=ppt/slides/slide29.xml><?xml version="1.0" encoding="utf-8"?>
-<p:sld xmlns:a="http://schemas.openxmlformats.org/drawingml/2006/main" xmlns:p="http://schemas.openxmlformats.org/presentationml/2006/main" xmlns:r="http://schemas.openxmlformats.org/officeDocument/2006/relationships">
-  <p:cSld>
-    <p:spTree>
-      <p:nvGrpSpPr>
-        <p:cNvPr id="1" name=""/>
-        <p:cNvGrpSpPr/>
-        <p:nvPr/>
-      </p:nvGrpSpPr>
-      <p:grpSpPr/>
-      <p:sp>
-        <p:nvSpPr>
-          <p:cNvPr id="2" name="Title 1"/>
-          <p:cNvSpPr>
-            <a:spLocks noGrp="1"/>
-          </p:cNvSpPr>
-          <p:nvPr>
-            <p:ph type="title"/>
-          </p:nvPr>
-        </p:nvSpPr>
-        <p:spPr/>
-        <p:txBody>
-          <a:bodyPr/>
-          <a:lstStyle/>
-          <a:p>
-            <a:r>
-              <a:t>Conclusão</a:t>
-            </a:r>
-          </a:p>
-        </p:txBody>
-      </p:sp>
-      <p:sp>
-        <p:nvSpPr>
-          <p:cNvPr id="3" name="Content Placeholder 2"/>
-          <p:cNvSpPr>
-            <a:spLocks noGrp="1"/>
-          </p:cNvSpPr>
-          <p:nvPr>
-            <p:ph idx="1"/>
-          </p:nvPr>
-        </p:nvSpPr>
-        <p:spPr/>
-        <p:txBody>
-          <a:bodyPr/>
-          <a:lstStyle/>
-          <a:p/>
-          <a:p>
-            <a:pPr lvl="1">
-              <a:defRPr sz="2000"/>
-            </a:pPr>
-            <a:r>
-              <a:t>A arquitetura distribuída do Spectrum provou que a transição de cargas pesadas para uma execução via filas destrava o treinamento exaustivo sem consumir o maquinário local do analista.</a:t>
-            </a:r>
-          </a:p>
-          <a:p>
-            <a:pPr lvl="1">
-              <a:defRPr sz="2000"/>
-            </a:pPr>
-            <a:r>
-              <a:t>A linguagem estruturada IQL quebra o modelo de observação estática de outras ferramentas, permitindo ao cientista a prospecção e extração guiada de regras específicas imersas nos e-graphs.</a:t>
-            </a:r>
-          </a:p>
-          <a:p>
-            <a:pPr lvl="1">
-              <a:defRPr sz="2000"/>
-            </a:pPr>
-            <a:r>
-              <a:t>Centralizar as visualizações otimizadas acopladas ao redator acadêmico agilizou com eficiência os fluxos metodológicos.</a:t>
-            </a:r>
-          </a:p>
-        </p:txBody>
-      </p:sp>
-    </p:spTree>
-  </p:cSld>
-  <p:clrMapOvr>
-    <a:masterClrMapping/>
-  </p:clrMapOvr>
-</p:sld>
-</file>
-
 <file path=ppt/slides/slide3.xml><?xml version="1.0" encoding="utf-8"?>
 <p:sld xmlns:a="http://schemas.openxmlformats.org/drawingml/2006/main" xmlns:p="http://schemas.openxmlformats.org/presentationml/2006/main" xmlns:r="http://schemas.openxmlformats.org/officeDocument/2006/relationships">
   <p:cSld>
@@ -5242,7 +5276,7 @@
           <a:lstStyle/>
           <a:p>
             <a:r>
-              <a:t>Trabalhos Futuros</a:t>
+              <a:t>Comparação Analítica de Plataformas</a:t>
             </a:r>
           </a:p>
         </p:txBody>
@@ -5263,27 +5297,11 @@
           <a:lstStyle/>
           <a:p/>
           <a:p>
-            <a:pPr lvl="1">
-              <a:defRPr sz="2000"/>
-            </a:pPr>
-            <a:r>
-              <a:t>Resiliência de Rede: Implantar o padrão arquitetural estrito no código do backend para garantir que nenhum processo se perca.</a:t>
-            </a:r>
-          </a:p>
-          <a:p>
-            <a:pPr lvl="1">
-              <a:defRPr sz="2000"/>
-            </a:pPr>
-            <a:r>
-              <a:t>Suporte Estendido: Possibilitar a integração opcional da camada de treinamento para interligar as execuções IQL aos motores otimizados em C++ (ex. PySR).</a:t>
-            </a:r>
-          </a:p>
-          <a:p>
-            <a:pPr lvl="1">
-              <a:defRPr sz="2000"/>
-            </a:pPr>
-            <a:r>
-              <a:t>Tipagens Textuais Avançadas: Expandir o processador de dados para abranger e validar representações em texto, provindas da computação através de embeddings numéricos.</a:t>
+            <a:pPr>
+              <a:defRPr sz="2200"/>
+            </a:pPr>
+            <a:r>
+              <a:t>Comparação de funcionalidades essenciais para pesquisa em Regressão Simbólica.</a:t>
             </a:r>
           </a:p>
         </p:txBody>
@@ -5297,6 +5315,166 @@
 </file>
 
 <file path=ppt/slides/slide31.xml><?xml version="1.0" encoding="utf-8"?>
+<p:sld xmlns:a="http://schemas.openxmlformats.org/drawingml/2006/main" xmlns:p="http://schemas.openxmlformats.org/presentationml/2006/main" xmlns:r="http://schemas.openxmlformats.org/officeDocument/2006/relationships">
+  <p:cSld>
+    <p:spTree>
+      <p:nvGrpSpPr>
+        <p:cNvPr id="1" name=""/>
+        <p:cNvGrpSpPr/>
+        <p:nvPr/>
+      </p:nvGrpSpPr>
+      <p:grpSpPr/>
+      <p:sp>
+        <p:nvSpPr>
+          <p:cNvPr id="2" name="Title 1"/>
+          <p:cNvSpPr>
+            <a:spLocks noGrp="1"/>
+          </p:cNvSpPr>
+          <p:nvPr>
+            <p:ph type="title"/>
+          </p:nvPr>
+        </p:nvSpPr>
+        <p:spPr/>
+        <p:txBody>
+          <a:bodyPr/>
+          <a:lstStyle/>
+          <a:p>
+            <a:r>
+              <a:t>Conclusão</a:t>
+            </a:r>
+          </a:p>
+        </p:txBody>
+      </p:sp>
+      <p:sp>
+        <p:nvSpPr>
+          <p:cNvPr id="3" name="Content Placeholder 2"/>
+          <p:cNvSpPr>
+            <a:spLocks noGrp="1"/>
+          </p:cNvSpPr>
+          <p:nvPr>
+            <p:ph idx="1"/>
+          </p:nvPr>
+        </p:nvSpPr>
+        <p:spPr/>
+        <p:txBody>
+          <a:bodyPr/>
+          <a:lstStyle/>
+          <a:p/>
+          <a:p>
+            <a:pPr lvl="1">
+              <a:defRPr sz="2000"/>
+            </a:pPr>
+            <a:r>
+              <a:t>A arquitetura distribuída do Spectrum provou que a transição de cargas pesadas para uma execução via filas destrava o treinamento exaustivo sem consumir o maquinário local do analista.</a:t>
+            </a:r>
+          </a:p>
+          <a:p>
+            <a:pPr lvl="1">
+              <a:defRPr sz="2000"/>
+            </a:pPr>
+            <a:r>
+              <a:t>A linguagem estruturada IQL quebra o modelo de observação estática de outras ferramentas, permitindo ao cientista a prospecção e extração guiada de regras específicas imersas nos e-graphs.</a:t>
+            </a:r>
+          </a:p>
+          <a:p>
+            <a:pPr lvl="1">
+              <a:defRPr sz="2000"/>
+            </a:pPr>
+            <a:r>
+              <a:t>Centralizar as visualizações otimizadas acopladas ao redator acadêmico agilizou com eficiência os fluxos metodológicos.</a:t>
+            </a:r>
+          </a:p>
+        </p:txBody>
+      </p:sp>
+    </p:spTree>
+  </p:cSld>
+  <p:clrMapOvr>
+    <a:masterClrMapping/>
+  </p:clrMapOvr>
+</p:sld>
+</file>
+
+<file path=ppt/slides/slide32.xml><?xml version="1.0" encoding="utf-8"?>
+<p:sld xmlns:a="http://schemas.openxmlformats.org/drawingml/2006/main" xmlns:p="http://schemas.openxmlformats.org/presentationml/2006/main" xmlns:r="http://schemas.openxmlformats.org/officeDocument/2006/relationships">
+  <p:cSld>
+    <p:spTree>
+      <p:nvGrpSpPr>
+        <p:cNvPr id="1" name=""/>
+        <p:cNvGrpSpPr/>
+        <p:nvPr/>
+      </p:nvGrpSpPr>
+      <p:grpSpPr/>
+      <p:sp>
+        <p:nvSpPr>
+          <p:cNvPr id="2" name="Title 1"/>
+          <p:cNvSpPr>
+            <a:spLocks noGrp="1"/>
+          </p:cNvSpPr>
+          <p:nvPr>
+            <p:ph type="title"/>
+          </p:nvPr>
+        </p:nvSpPr>
+        <p:spPr/>
+        <p:txBody>
+          <a:bodyPr/>
+          <a:lstStyle/>
+          <a:p>
+            <a:r>
+              <a:t>Trabalhos Futuros</a:t>
+            </a:r>
+          </a:p>
+        </p:txBody>
+      </p:sp>
+      <p:sp>
+        <p:nvSpPr>
+          <p:cNvPr id="3" name="Content Placeholder 2"/>
+          <p:cNvSpPr>
+            <a:spLocks noGrp="1"/>
+          </p:cNvSpPr>
+          <p:nvPr>
+            <p:ph idx="1"/>
+          </p:nvPr>
+        </p:nvSpPr>
+        <p:spPr/>
+        <p:txBody>
+          <a:bodyPr/>
+          <a:lstStyle/>
+          <a:p/>
+          <a:p>
+            <a:pPr lvl="1">
+              <a:defRPr sz="2000"/>
+            </a:pPr>
+            <a:r>
+              <a:t>Resiliência de Rede: Implantar o padrão arquitetural estrito no código do backend para garantir que nenhum processo se perca.</a:t>
+            </a:r>
+          </a:p>
+          <a:p>
+            <a:pPr lvl="1">
+              <a:defRPr sz="2000"/>
+            </a:pPr>
+            <a:r>
+              <a:t>Suporte Estendido: Possibilitar a integração opcional da camada de treinamento para interligar as execuções IQL aos motores otimizados em C++ (ex. PySR).</a:t>
+            </a:r>
+          </a:p>
+          <a:p>
+            <a:pPr lvl="1">
+              <a:defRPr sz="2000"/>
+            </a:pPr>
+            <a:r>
+              <a:t>Tipagens Textuais Avançadas: Expandir o processador de dados para abranger e validar representações em texto, provindas da computação através de embeddings numéricos.</a:t>
+            </a:r>
+          </a:p>
+        </p:txBody>
+      </p:sp>
+    </p:spTree>
+  </p:cSld>
+  <p:clrMapOvr>
+    <a:masterClrMapping/>
+  </p:clrMapOvr>
+</p:sld>
+</file>
+
+<file path=ppt/slides/slide33.xml><?xml version="1.0" encoding="utf-8"?>
 <p:sld xmlns:a="http://schemas.openxmlformats.org/drawingml/2006/main" xmlns:p="http://schemas.openxmlformats.org/presentationml/2006/main" xmlns:r="http://schemas.openxmlformats.org/officeDocument/2006/relationships">
   <p:cSld>
     <p:spTree>
